--- a/Bank_Marketing_Subscription_Prediction.pptx
+++ b/Bank_Marketing_Subscription_Prediction.pptx
@@ -4,6 +4,9 @@
   <p:sldMasterIdLst>
     <p:sldMasterId id="2147483648" r:id="rId1"/>
   </p:sldMasterIdLst>
+  <p:notesMasterIdLst>
+    <p:notesMasterId r:id="rId12"/>
+  </p:notesMasterIdLst>
   <p:sldIdLst>
     <p:sldId id="256" r:id="rId2"/>
     <p:sldId id="257" r:id="rId3"/>
@@ -16,11 +19,8 @@
     <p:sldId id="264" r:id="rId10"/>
     <p:sldId id="265" r:id="rId11"/>
   </p:sldIdLst>
-  <p:notesMasterIdLst>
-    <p:notesMasterId r:id="rId12"/>
-  </p:notesMasterIdLst>
-  <p:sldSz cx="12191695" cy="6858000"/>
-  <p:notesSz cx="6858000" cy="12191695"/>
+  <p:sldSz cx="12192000" cy="6858000"/>
+  <p:notesSz cx="6858000" cy="12192000"/>
   <p:defaultTextStyle>
     <a:lvl1pPr marL="0" algn="l" defTabSz="914400" rtl="0" eaLnBrk="1" latinLnBrk="0" hangingPunct="1">
       <a:defRPr sz="1800" kern="1200">
@@ -113,6 +113,11 @@
       </a:defRPr>
     </a:lvl9pPr>
   </p:defaultTextStyle>
+  <p:extLst>
+    <p:ext uri="{EFAFB233-063F-42B5-8137-9DF3F51BA10A}">
+      <p15:sldGuideLst xmlns:p15="http://schemas.microsoft.com/office/powerpoint/2012/main"/>
+    </p:ext>
+  </p:extLst>
 </p:presentation>
 </file>
 
@@ -138,234 +143,10 @@
           <a:chExt cx="0" cy="0"/>
         </a:xfrm>
       </p:grpSpPr>
-      <p:sp>
-        <p:nvSpPr>
-          <p:cNvPr id="2" name="Header Placeholder 1"/>
-          <p:cNvSpPr>
-            <a:spLocks noGrp="1"/>
-          </p:cNvSpPr>
-          <p:nvPr>
-            <p:ph type="hdr" sz="quarter"/>
-          </p:nvPr>
-        </p:nvSpPr>
-        <p:spPr>
-          <a:xfrm>
-            <a:off x="0" y="0"/>
-            <a:ext cx="2971800" cy="458788"/>
-          </a:xfrm>
-          <a:prstGeom prst="rect">
-            <a:avLst/>
-          </a:prstGeom>
-        </p:spPr>
-        <p:txBody>
-          <a:bodyPr vert="horz" lIns="91440" tIns="45720" rIns="91440" bIns="45720" rtlCol="0"/>
-          <a:lstStyle>
-            <a:lvl1pPr algn="l">
-              <a:defRPr sz="1200"/>
-            </a:lvl1pPr>
-          </a:lstStyle>
-          <a:p>
-            <a:endParaRPr lang="en-US"/>
-          </a:p>
-        </p:txBody>
-      </p:sp>
-      <p:sp>
-        <p:nvSpPr>
-          <p:cNvPr id="3" name="Date Placeholder 2"/>
-          <p:cNvSpPr>
-            <a:spLocks noGrp="1"/>
-          </p:cNvSpPr>
-          <p:nvPr>
-            <p:ph type="dt" idx="1"/>
-          </p:nvPr>
-        </p:nvSpPr>
-        <p:spPr>
-          <a:xfrm>
-            <a:off x="3884613" y="0"/>
-            <a:ext cx="2971800" cy="458788"/>
-          </a:xfrm>
-          <a:prstGeom prst="rect">
-            <a:avLst/>
-          </a:prstGeom>
-        </p:spPr>
-        <p:txBody>
-          <a:bodyPr vert="horz" lIns="91440" tIns="45720" rIns="91440" bIns="45720" rtlCol="0"/>
-          <a:lstStyle>
-            <a:lvl1pPr algn="r">
-              <a:defRPr sz="1200"/>
-            </a:lvl1pPr>
-          </a:lstStyle>
-          <a:p>
-            <a:fld id="{5282F153-3F37-0F45-9E97-73ACFA13230C}" type="datetimeFigureOut">
-              <a:rPr lang="en-US"/>
-              <a:t>7/23/19</a:t>
-            </a:fld>
-            <a:endParaRPr lang="en-US"/>
-          </a:p>
-        </p:txBody>
-      </p:sp>
-      <p:sp>
-        <p:nvSpPr>
-          <p:cNvPr id="4" name="Slide Image Placeholder 3"/>
-          <p:cNvSpPr>
-            <a:spLocks noGrp="1" noRot="1" noChangeAspect="1"/>
-          </p:cNvSpPr>
-          <p:nvPr>
-            <p:ph type="sldImg" idx="2"/>
-          </p:nvPr>
-        </p:nvSpPr>
-        <p:spPr>
-          <a:xfrm>
-            <a:off x="685800" y="1143000"/>
-            <a:ext cx="5486400" cy="3086100"/>
-          </a:xfrm>
-          <a:prstGeom prst="rect">
-            <a:avLst/>
-          </a:prstGeom>
-          <a:noFill/>
-          <a:ln w="12700">
-            <a:solidFill>
-              <a:prstClr val="black"/>
-            </a:solidFill>
-          </a:ln>
-        </p:spPr>
-        <p:txBody>
-          <a:bodyPr vert="horz" lIns="91440" tIns="45720" rIns="91440" bIns="45720" rtlCol="0" anchor="ctr"/>
-          <a:lstStyle/>
-          <a:p>
-            <a:endParaRPr lang="en-US"/>
-          </a:p>
-        </p:txBody>
-      </p:sp>
-      <p:sp>
-        <p:nvSpPr>
-          <p:cNvPr id="5" name="Notes Placeholder 4"/>
-          <p:cNvSpPr>
-            <a:spLocks noGrp="1"/>
-          </p:cNvSpPr>
-          <p:nvPr>
-            <p:ph type="body" sz="quarter" idx="3"/>
-          </p:nvPr>
-        </p:nvSpPr>
-        <p:spPr>
-          <a:xfrm>
-            <a:off x="685800" y="4400550"/>
-            <a:ext cx="5486400" cy="3600450"/>
-          </a:xfrm>
-          <a:prstGeom prst="rect">
-            <a:avLst/>
-          </a:prstGeom>
-        </p:spPr>
-        <p:txBody>
-          <a:bodyPr vert="horz" lIns="91440" tIns="45720" rIns="91440" bIns="45720" rtlCol="0"/>
-          <a:lstStyle/>
-          <a:p>
-            <a:pPr lvl="0"/>
-            <a:r>
-              <a:rPr lang="en-US"/>
-              <a:t>Click to edit Master text styles</a:t>
-            </a:r>
-          </a:p>
-          <a:p>
-            <a:pPr lvl="1"/>
-            <a:r>
-              <a:rPr lang="en-US"/>
-              <a:t>Second level</a:t>
-            </a:r>
-          </a:p>
-          <a:p>
-            <a:pPr lvl="2"/>
-            <a:r>
-              <a:rPr lang="en-US"/>
-              <a:t>Third level</a:t>
-            </a:r>
-          </a:p>
-          <a:p>
-            <a:pPr lvl="3"/>
-            <a:r>
-              <a:rPr lang="en-US"/>
-              <a:t>Fourth level</a:t>
-            </a:r>
-          </a:p>
-          <a:p>
-            <a:pPr lvl="4"/>
-            <a:r>
-              <a:rPr lang="en-US"/>
-              <a:t>Fifth level</a:t>
-            </a:r>
-          </a:p>
-        </p:txBody>
-      </p:sp>
-      <p:sp>
-        <p:nvSpPr>
-          <p:cNvPr id="6" name="Footer Placeholder 5"/>
-          <p:cNvSpPr>
-            <a:spLocks noGrp="1"/>
-          </p:cNvSpPr>
-          <p:nvPr>
-            <p:ph type="ftr" sz="quarter" idx="4"/>
-          </p:nvPr>
-        </p:nvSpPr>
-        <p:spPr>
-          <a:xfrm>
-            <a:off x="0" y="8685213"/>
-            <a:ext cx="2971800" cy="458787"/>
-          </a:xfrm>
-          <a:prstGeom prst="rect">
-            <a:avLst/>
-          </a:prstGeom>
-        </p:spPr>
-        <p:txBody>
-          <a:bodyPr vert="horz" lIns="91440" tIns="45720" rIns="91440" bIns="45720" rtlCol="0" anchor="b"/>
-          <a:lstStyle>
-            <a:lvl1pPr algn="l">
-              <a:defRPr sz="1200"/>
-            </a:lvl1pPr>
-          </a:lstStyle>
-          <a:p>
-            <a:endParaRPr lang="en-US"/>
-          </a:p>
-        </p:txBody>
-      </p:sp>
-      <p:sp>
-        <p:nvSpPr>
-          <p:cNvPr id="7" name="Slide Number Placeholder 6"/>
-          <p:cNvSpPr>
-            <a:spLocks noGrp="1"/>
-          </p:cNvSpPr>
-          <p:nvPr>
-            <p:ph type="sldNum" sz="quarter" idx="5"/>
-          </p:nvPr>
-        </p:nvSpPr>
-        <p:spPr>
-          <a:xfrm>
-            <a:off x="3884613" y="8685213"/>
-            <a:ext cx="2971800" cy="458787"/>
-          </a:xfrm>
-          <a:prstGeom prst="rect">
-            <a:avLst/>
-          </a:prstGeom>
-        </p:spPr>
-        <p:txBody>
-          <a:bodyPr vert="horz" lIns="91440" tIns="45720" rIns="91440" bIns="45720" rtlCol="0" anchor="b"/>
-          <a:lstStyle>
-            <a:lvl1pPr algn="r">
-              <a:defRPr sz="1200"/>
-            </a:lvl1pPr>
-          </a:lstStyle>
-          <a:p>
-            <a:fld id="{CE5E9CC1-C706-0F49-92D6-E571CC5EEA8F}" type="slidenum">
-              <a:rPr lang="en-US"/>
-              <a:t>‹#›</a:t>
-            </a:fld>
-            <a:endParaRPr lang="en-US"/>
-          </a:p>
-        </p:txBody>
-      </p:sp>
     </p:spTree>
     <p:extLst>
       <p:ext uri="{BB962C8B-B14F-4D97-AF65-F5344CB8AC3E}">
-        <p14:creationId xmlns:p14="http://schemas.microsoft.com/office/powerpoint/2010/main" val="1024086991"/>
+        <p14:creationId xmlns:p14="http://schemas.microsoft.com/office/powerpoint/2010/main" val="3494210355"/>
       </p:ext>
     </p:extLst>
   </p:cSld>
@@ -513,7 +294,6 @@
               <a:rPr lang="en-US" dirty="0"/>
               <a:t>Open by framing the project as a supervised learning solution for a real bank marketing use case. Point out the actual dataset size and the major target imbalance shown on the right.</a:t>
             </a:r>
-            <a:endParaRPr lang="en-US" dirty="0"/>
           </a:p>
         </p:txBody>
       </p:sp>
@@ -601,7 +381,6 @@
               <a:rPr lang="en-US" dirty="0"/>
               <a:t>Close with the practical takeaway. The model is valuable for prioritization, but the duration variable creates leakage for pre-call targeting because it is only known after the call begins. Therefore, deployment should use a duration-free model or treat duration only as an explanatory feature.</a:t>
             </a:r>
-            <a:endParaRPr lang="en-US" dirty="0"/>
           </a:p>
         </p:txBody>
       </p:sp>
@@ -689,7 +468,6 @@
               <a:rPr lang="en-US" dirty="0"/>
               <a:t>Explain that the problem is operational: contact capacity is limited, so the bank needs a ranked list of clients. The model supports that prioritization by estimating subscription probabilities.</a:t>
             </a:r>
-            <a:endParaRPr lang="en-US" dirty="0"/>
           </a:p>
         </p:txBody>
       </p:sp>
@@ -777,7 +555,6 @@
               <a:rPr lang="en-US" dirty="0"/>
               <a:t>Use the plots to discuss data imbalance and heterogeneity by campaign month and previous campaign outcome. Stress that because the positive class is only 11.7 percent, evaluation requires metrics beyond accuracy.</a:t>
             </a:r>
-            <a:endParaRPr lang="en-US" dirty="0"/>
           </a:p>
         </p:txBody>
       </p:sp>
@@ -865,7 +642,6 @@
               <a:rPr lang="en-US" dirty="0"/>
               <a:t>Walk through the pipeline. Emphasize that stratified splitting preserves the target distribution and that pipelines prevent leakage from preprocessing into validation or test evaluation.</a:t>
             </a:r>
-            <a:endParaRPr lang="en-US" dirty="0"/>
           </a:p>
         </p:txBody>
       </p:sp>
@@ -953,7 +729,6 @@
               <a:rPr lang="en-US" dirty="0"/>
               <a:t>Explain why the two preprocessing pipelines differ. Logistic Regression needs standardized numerical variables; Random Forest does not. Both handle categorical variables with one-hot encoding and are wrapped in pipelines.</a:t>
             </a:r>
-            <a:endParaRPr lang="en-US" dirty="0"/>
           </a:p>
         </p:txBody>
       </p:sp>
@@ -1041,7 +816,6 @@
               <a:rPr lang="en-US" dirty="0"/>
               <a:t>Use the table to show why accuracy alone is insufficient. The baseline accuracy is high because most clients do not subscribe, but its precision, recall and F1 for the positive class are zero. Random Forest gives stronger ranking metrics than Logistic Regression.</a:t>
             </a:r>
-            <a:endParaRPr lang="en-US" dirty="0"/>
           </a:p>
         </p:txBody>
       </p:sp>
@@ -1129,7 +903,6 @@
               <a:rPr lang="en-US" dirty="0"/>
               <a:t>Present the held-out test metrics for the tuned Random Forest. The preferred model is chosen because it combines strong ranking performance with reasonable precision and recall, and it offers useful interpretability through feature importances.</a:t>
             </a:r>
-            <a:endParaRPr lang="en-US" dirty="0"/>
           </a:p>
         </p:txBody>
       </p:sp>
@@ -1217,7 +990,6 @@
               <a:rPr lang="en-US" dirty="0"/>
               <a:t>Explain thresholding as the bridge from model scores to marketing action. A lower threshold increases recall and contact volume, while a higher threshold prioritizes precision and a smaller campaign list.</a:t>
             </a:r>
-            <a:endParaRPr lang="en-US" dirty="0"/>
           </a:p>
         </p:txBody>
       </p:sp>
@@ -1305,7 +1077,6 @@
               <a:rPr lang="en-US" dirty="0"/>
               <a:t>Explain that feature importances were aggregated back to original variables after one-hot encoding. The Top 10 model performs similarly and even improves F1 and recall on the test set, which supports simpler deployment.</a:t>
             </a:r>
-            <a:endParaRPr lang="en-US" dirty="0"/>
           </a:p>
         </p:txBody>
       </p:sp>
@@ -1378,6 +1149,11 @@
 <file path=ppt/slideMasters/slideMaster1.xml><?xml version="1.0" encoding="utf-8"?>
 <p:sldMaster xmlns:a="http://schemas.openxmlformats.org/drawingml/2006/main" xmlns:r="http://schemas.openxmlformats.org/officeDocument/2006/relationships" xmlns:p="http://schemas.openxmlformats.org/presentationml/2006/main">
   <p:cSld>
+    <p:bg>
+      <p:bgRef idx="1001">
+        <a:schemeClr val="bg1"/>
+      </p:bgRef>
+    </p:bg>
     <p:spTree>
       <p:nvGrpSpPr>
         <p:cNvPr id="1" name=""/>
@@ -1660,6 +1436,7 @@
         <a:solidFill>
           <a:srgbClr val="FFFFFF"/>
         </a:solidFill>
+        <a:effectLst/>
       </p:bgPr>
     </p:bg>
     <p:spTree>
@@ -1700,6 +1477,13 @@
             <a:prstDash val="solid"/>
           </a:ln>
         </p:spPr>
+        <p:txBody>
+          <a:bodyPr/>
+          <a:lstStyle/>
+          <a:p>
+            <a:endParaRPr lang="en-GB"/>
+          </a:p>
+        </p:txBody>
       </p:sp>
       <p:sp>
         <p:nvSpPr>
@@ -1725,6 +1509,13 @@
             <a:prstDash val="solid"/>
           </a:ln>
         </p:spPr>
+        <p:txBody>
+          <a:bodyPr/>
+          <a:lstStyle/>
+          <a:p>
+            <a:endParaRPr lang="en-GB"/>
+          </a:p>
+        </p:txBody>
       </p:sp>
       <p:sp>
         <p:nvSpPr>
@@ -1747,7 +1538,7 @@
           <a:bodyPr wrap="square" lIns="0" tIns="0" rIns="0" bIns="0" rtlCol="0" anchor="ctr"/>
           <a:lstStyle/>
           <a:p>
-            <a:pPr indent="0" marL="0">
+            <a:pPr marL="0" indent="0">
               <a:buNone/>
             </a:pPr>
             <a:r>
@@ -1764,7 +1555,7 @@
             <a:endParaRPr lang="en-US" sz="4000" dirty="0"/>
           </a:p>
           <a:p>
-            <a:pPr indent="0" marL="0">
+            <a:pPr marL="0" indent="0">
               <a:buNone/>
             </a:pPr>
             <a:r>
@@ -1804,6 +1595,13 @@
             <a:prstDash val="solid"/>
           </a:ln>
         </p:spPr>
+        <p:txBody>
+          <a:bodyPr/>
+          <a:lstStyle/>
+          <a:p>
+            <a:endParaRPr lang="en-GB"/>
+          </a:p>
+        </p:txBody>
       </p:sp>
       <p:sp>
         <p:nvSpPr>
@@ -1826,7 +1624,7 @@
           <a:bodyPr wrap="square" lIns="0" tIns="0" rIns="0" bIns="0" rtlCol="0" anchor="ctr"/>
           <a:lstStyle/>
           <a:p>
-            <a:pPr indent="0" marL="0">
+            <a:pPr marL="0" indent="0">
               <a:buNone/>
             </a:pPr>
             <a:r>
@@ -1862,7 +1660,7 @@
           <a:bodyPr wrap="square" lIns="0" tIns="0" rIns="0" bIns="0" rtlCol="0" anchor="ctr"/>
           <a:lstStyle/>
           <a:p>
-            <a:pPr indent="0" marL="0">
+            <a:pPr marL="0" indent="0">
               <a:buNone/>
             </a:pPr>
             <a:r>
@@ -1898,7 +1696,7 @@
           <a:bodyPr wrap="square" lIns="0" tIns="0" rIns="0" bIns="0" rtlCol="0" anchor="ctr"/>
           <a:lstStyle/>
           <a:p>
-            <a:pPr indent="0" marL="0">
+            <a:pPr marL="0" indent="0">
               <a:buNone/>
             </a:pPr>
             <a:r>
@@ -1941,6 +1739,13 @@
             <a:prstDash val="solid"/>
           </a:ln>
         </p:spPr>
+        <p:txBody>
+          <a:bodyPr/>
+          <a:lstStyle/>
+          <a:p>
+            <a:endParaRPr lang="en-GB"/>
+          </a:p>
+        </p:txBody>
       </p:sp>
       <p:sp>
         <p:nvSpPr>
@@ -1963,7 +1768,7 @@
           <a:bodyPr wrap="square" lIns="0" tIns="0" rIns="0" bIns="0" rtlCol="0" anchor="ctr"/>
           <a:lstStyle/>
           <a:p>
-            <a:pPr indent="0" marL="0">
+            <a:pPr marL="0" indent="0">
               <a:buNone/>
             </a:pPr>
             <a:r>
@@ -1980,14 +1785,14 @@
       </p:sp>
       <p:pic>
         <p:nvPicPr>
-          <p:cNvPr id="11" name="Image 0" descr="/mnt/data/key_extracted_plots/02_target_distribution_count.png">    </p:cNvPr>
+          <p:cNvPr id="11" name="Image 0" descr="/mnt/data/key_extracted_plots/02_target_distribution_count.png"/>
           <p:cNvPicPr>
             <a:picLocks noChangeAspect="1"/>
           </p:cNvPicPr>
           <p:nvPr/>
         </p:nvPicPr>
         <p:blipFill>
-          <a:blip r:embed="rId1"/>
+          <a:blip r:embed="rId3"/>
           <a:stretch>
             <a:fillRect/>
           </a:stretch>
@@ -2030,6 +1835,13 @@
             <a:prstDash val="solid"/>
           </a:ln>
         </p:spPr>
+        <p:txBody>
+          <a:bodyPr/>
+          <a:lstStyle/>
+          <a:p>
+            <a:endParaRPr lang="en-GB"/>
+          </a:p>
+        </p:txBody>
       </p:sp>
       <p:sp>
         <p:nvSpPr>
@@ -2055,6 +1867,13 @@
             <a:prstDash val="solid"/>
           </a:ln>
         </p:spPr>
+        <p:txBody>
+          <a:bodyPr/>
+          <a:lstStyle/>
+          <a:p>
+            <a:endParaRPr lang="en-GB"/>
+          </a:p>
+        </p:txBody>
       </p:sp>
       <p:sp>
         <p:nvSpPr>
@@ -2077,7 +1896,7 @@
           <a:bodyPr wrap="square" lIns="0" tIns="0" rIns="0" bIns="0" rtlCol="0" anchor="ctr"/>
           <a:lstStyle/>
           <a:p>
-            <a:pPr algn="ctr" indent="0" marL="0">
+            <a:pPr marL="0" indent="0" algn="ctr">
               <a:buNone/>
             </a:pPr>
             <a:r>
@@ -2113,7 +1932,7 @@
           <a:bodyPr wrap="square" lIns="0" tIns="0" rIns="0" bIns="0" rtlCol="0" anchor="ctr"/>
           <a:lstStyle/>
           <a:p>
-            <a:pPr algn="ctr" indent="0" marL="0">
+            <a:pPr marL="0" indent="0" algn="ctr">
               <a:buNone/>
             </a:pPr>
             <a:r>
@@ -2122,7 +1941,7 @@
                   <a:srgbClr val="5B6770"/>
                 </a:solidFill>
               </a:rPr>
-              <a:t>observations</a:t>
+              <a:t>Clients contacted</a:t>
             </a:r>
             <a:endParaRPr lang="en-US" sz="850" dirty="0"/>
           </a:p>
@@ -2156,6 +1975,13 @@
             <a:prstDash val="solid"/>
           </a:ln>
         </p:spPr>
+        <p:txBody>
+          <a:bodyPr/>
+          <a:lstStyle/>
+          <a:p>
+            <a:endParaRPr lang="en-GB"/>
+          </a:p>
+        </p:txBody>
       </p:sp>
       <p:sp>
         <p:nvSpPr>
@@ -2181,6 +2007,13 @@
             <a:prstDash val="solid"/>
           </a:ln>
         </p:spPr>
+        <p:txBody>
+          <a:bodyPr/>
+          <a:lstStyle/>
+          <a:p>
+            <a:endParaRPr lang="en-GB"/>
+          </a:p>
+        </p:txBody>
       </p:sp>
       <p:sp>
         <p:nvSpPr>
@@ -2203,7 +2036,7 @@
           <a:bodyPr wrap="square" lIns="0" tIns="0" rIns="0" bIns="0" rtlCol="0" anchor="ctr"/>
           <a:lstStyle/>
           <a:p>
-            <a:pPr algn="ctr" indent="0" marL="0">
+            <a:pPr marL="0" indent="0" algn="ctr">
               <a:buNone/>
             </a:pPr>
             <a:r>
@@ -2239,7 +2072,7 @@
           <a:bodyPr wrap="square" lIns="0" tIns="0" rIns="0" bIns="0" rtlCol="0" anchor="ctr"/>
           <a:lstStyle/>
           <a:p>
-            <a:pPr algn="ctr" indent="0" marL="0">
+            <a:pPr marL="0" indent="0" algn="ctr">
               <a:buNone/>
             </a:pPr>
             <a:r>
@@ -2248,7 +2081,7 @@
                   <a:srgbClr val="5B6770"/>
                 </a:solidFill>
               </a:rPr>
-              <a:t>positive class</a:t>
+              <a:t>Positive class</a:t>
             </a:r>
             <a:endParaRPr lang="en-US" sz="850" dirty="0"/>
           </a:p>
@@ -2273,11 +2106,11 @@
         </p:spPr>
         <p:txBody>
           <a:bodyPr wrap="square" lIns="0" tIns="0" rIns="0" bIns="0" rtlCol="0" anchor="ctr">
-            <a:normAutofit/>
+            <a:normAutofit fontScale="92500"/>
           </a:bodyPr>
           <a:lstStyle/>
           <a:p>
-            <a:pPr algn="ctr" indent="0" marL="0">
+            <a:pPr marL="0" indent="0" algn="ctr">
               <a:buNone/>
             </a:pPr>
             <a:r>
@@ -2308,6 +2141,7 @@
         <a:solidFill>
           <a:srgbClr val="FFFFFF"/>
         </a:solidFill>
+        <a:effectLst/>
       </p:bgPr>
     </p:bg>
     <p:spTree>
@@ -2348,6 +2182,13 @@
             <a:prstDash val="solid"/>
           </a:ln>
         </p:spPr>
+        <p:txBody>
+          <a:bodyPr/>
+          <a:lstStyle/>
+          <a:p>
+            <a:endParaRPr lang="en-GB"/>
+          </a:p>
+        </p:txBody>
       </p:sp>
       <p:sp>
         <p:nvSpPr>
@@ -2370,7 +2211,7 @@
           <a:bodyPr wrap="square" lIns="0" tIns="0" rIns="0" bIns="0" rtlCol="0" anchor="ctr"/>
           <a:lstStyle/>
           <a:p>
-            <a:pPr indent="0" marL="0">
+            <a:pPr marL="0" indent="0">
               <a:buNone/>
             </a:pPr>
             <a:r>
@@ -2409,7 +2250,7 @@
           <a:bodyPr wrap="square" lIns="0" tIns="0" rIns="0" bIns="0" rtlCol="0" anchor="ctr"/>
           <a:lstStyle/>
           <a:p>
-            <a:pPr indent="0" marL="0">
+            <a:pPr marL="0" indent="0">
               <a:buNone/>
             </a:pPr>
             <a:r>
@@ -2445,7 +2286,7 @@
           <a:bodyPr wrap="square" lIns="0" tIns="0" rIns="0" bIns="0" rtlCol="0" anchor="ctr"/>
           <a:lstStyle/>
           <a:p>
-            <a:pPr indent="0" marL="0">
+            <a:pPr marL="0" indent="0">
               <a:buNone/>
             </a:pPr>
             <a:r>
@@ -2481,7 +2322,7 @@
           <a:bodyPr wrap="square" lIns="0" tIns="0" rIns="0" bIns="0" rtlCol="0" anchor="ctr"/>
           <a:lstStyle/>
           <a:p>
-            <a:pPr algn="r" indent="0" marL="0">
+            <a:pPr marL="0" indent="0" algn="r">
               <a:buNone/>
             </a:pPr>
             <a:r>
@@ -2524,6 +2365,13 @@
             <a:prstDash val="solid"/>
           </a:ln>
         </p:spPr>
+        <p:txBody>
+          <a:bodyPr/>
+          <a:lstStyle/>
+          <a:p>
+            <a:endParaRPr lang="en-GB"/>
+          </a:p>
+        </p:txBody>
       </p:sp>
       <p:sp>
         <p:nvSpPr>
@@ -2546,7 +2394,7 @@
           <a:bodyPr wrap="square" lIns="0" tIns="0" rIns="0" bIns="0" rtlCol="0" anchor="ctr"/>
           <a:lstStyle/>
           <a:p>
-            <a:pPr indent="0" marL="0">
+            <a:pPr marL="0" indent="0">
               <a:buNone/>
             </a:pPr>
             <a:r>
@@ -2584,7 +2432,7 @@
           </a:bodyPr>
           <a:lstStyle/>
           <a:p>
-            <a:pPr indent="0" marL="0">
+            <a:pPr marL="0" indent="0">
               <a:buNone/>
             </a:pPr>
             <a:r>
@@ -2598,7 +2446,7 @@
             <a:endParaRPr lang="en-US" sz="1220" dirty="0"/>
           </a:p>
           <a:p>
-            <a:pPr indent="0" marL="0">
+            <a:pPr marL="0" indent="0">
               <a:buNone/>
             </a:pPr>
             <a:r>
@@ -2612,7 +2460,7 @@
             <a:endParaRPr lang="en-US" sz="1220" dirty="0"/>
           </a:p>
           <a:p>
-            <a:pPr indent="0" marL="0">
+            <a:pPr marL="0" indent="0">
               <a:buNone/>
             </a:pPr>
             <a:r>
@@ -2626,7 +2474,7 @@
             <a:endParaRPr lang="en-US" sz="1220" dirty="0"/>
           </a:p>
           <a:p>
-            <a:pPr indent="0" marL="0">
+            <a:pPr marL="0" indent="0">
               <a:buNone/>
             </a:pPr>
             <a:r>
@@ -2669,6 +2517,13 @@
             <a:prstDash val="solid"/>
           </a:ln>
         </p:spPr>
+        <p:txBody>
+          <a:bodyPr/>
+          <a:lstStyle/>
+          <a:p>
+            <a:endParaRPr lang="en-GB"/>
+          </a:p>
+        </p:txBody>
       </p:sp>
       <p:sp>
         <p:nvSpPr>
@@ -2691,7 +2546,7 @@
           <a:bodyPr wrap="square" lIns="0" tIns="0" rIns="0" bIns="0" rtlCol="0" anchor="ctr"/>
           <a:lstStyle/>
           <a:p>
-            <a:pPr indent="0" marL="0">
+            <a:pPr marL="0" indent="0">
               <a:buNone/>
             </a:pPr>
             <a:r>
@@ -2729,7 +2584,7 @@
           </a:bodyPr>
           <a:lstStyle/>
           <a:p>
-            <a:pPr indent="0" marL="0">
+            <a:pPr marL="0" indent="0">
               <a:buNone/>
             </a:pPr>
             <a:r>
@@ -2743,7 +2598,7 @@
             <a:endParaRPr lang="en-US" sz="1220" dirty="0"/>
           </a:p>
           <a:p>
-            <a:pPr indent="0" marL="0">
+            <a:pPr marL="0" indent="0">
               <a:buNone/>
             </a:pPr>
             <a:r>
@@ -2757,7 +2612,7 @@
             <a:endParaRPr lang="en-US" sz="1220" dirty="0"/>
           </a:p>
           <a:p>
-            <a:pPr indent="0" marL="0">
+            <a:pPr marL="0" indent="0">
               <a:buNone/>
             </a:pPr>
             <a:r>
@@ -2771,7 +2626,7 @@
             <a:endParaRPr lang="en-US" sz="1220" dirty="0"/>
           </a:p>
           <a:p>
-            <a:pPr indent="0" marL="0">
+            <a:pPr marL="0" indent="0">
               <a:buNone/>
             </a:pPr>
             <a:r>
@@ -2810,6 +2665,13 @@
             <a:prstDash val="solid"/>
           </a:ln>
         </p:spPr>
+        <p:txBody>
+          <a:bodyPr/>
+          <a:lstStyle/>
+          <a:p>
+            <a:endParaRPr lang="en-GB"/>
+          </a:p>
+        </p:txBody>
       </p:sp>
       <p:sp>
         <p:nvSpPr>
@@ -2832,7 +2694,7 @@
           <a:bodyPr wrap="square" lIns="0" tIns="0" rIns="0" bIns="0" rtlCol="0" anchor="ctr"/>
           <a:lstStyle/>
           <a:p>
-            <a:pPr algn="ctr" indent="0" marL="0">
+            <a:pPr marL="0" indent="0" algn="ctr">
               <a:buNone/>
             </a:pPr>
             <a:r>
@@ -2871,6 +2733,13 @@
             <a:prstDash val="solid"/>
           </a:ln>
         </p:spPr>
+        <p:txBody>
+          <a:bodyPr/>
+          <a:lstStyle/>
+          <a:p>
+            <a:endParaRPr lang="en-GB"/>
+          </a:p>
+        </p:txBody>
       </p:sp>
       <p:sp>
         <p:nvSpPr>
@@ -2893,7 +2762,7 @@
           <a:bodyPr wrap="square" lIns="0" tIns="0" rIns="0" bIns="0" rtlCol="0" anchor="ctr"/>
           <a:lstStyle/>
           <a:p>
-            <a:pPr algn="ctr" indent="0" marL="0">
+            <a:pPr marL="0" indent="0" algn="ctr">
               <a:buNone/>
             </a:pPr>
             <a:r>
@@ -2932,6 +2801,13 @@
             <a:prstDash val="solid"/>
           </a:ln>
         </p:spPr>
+        <p:txBody>
+          <a:bodyPr/>
+          <a:lstStyle/>
+          <a:p>
+            <a:endParaRPr lang="en-GB"/>
+          </a:p>
+        </p:txBody>
       </p:sp>
       <p:sp>
         <p:nvSpPr>
@@ -2954,7 +2830,7 @@
           <a:bodyPr wrap="square" lIns="0" tIns="0" rIns="0" bIns="0" rtlCol="0" anchor="ctr"/>
           <a:lstStyle/>
           <a:p>
-            <a:pPr algn="ctr" indent="0" marL="0">
+            <a:pPr marL="0" indent="0" algn="ctr">
               <a:buNone/>
             </a:pPr>
             <a:r>
@@ -2993,6 +2869,13 @@
             <a:prstDash val="solid"/>
           </a:ln>
         </p:spPr>
+        <p:txBody>
+          <a:bodyPr/>
+          <a:lstStyle/>
+          <a:p>
+            <a:endParaRPr lang="en-GB"/>
+          </a:p>
+        </p:txBody>
       </p:sp>
       <p:sp>
         <p:nvSpPr>
@@ -3015,7 +2898,7 @@
           <a:bodyPr wrap="square" lIns="0" tIns="0" rIns="0" bIns="0" rtlCol="0" anchor="ctr"/>
           <a:lstStyle/>
           <a:p>
-            <a:pPr algn="ctr" indent="0" marL="0">
+            <a:pPr marL="0" indent="0" algn="ctr">
               <a:buNone/>
             </a:pPr>
             <a:r>
@@ -3054,6 +2937,13 @@
             <a:prstDash val="solid"/>
           </a:ln>
         </p:spPr>
+        <p:txBody>
+          <a:bodyPr/>
+          <a:lstStyle/>
+          <a:p>
+            <a:endParaRPr lang="en-GB"/>
+          </a:p>
+        </p:txBody>
       </p:sp>
       <p:sp>
         <p:nvSpPr>
@@ -3076,7 +2966,7 @@
           <a:bodyPr wrap="square" lIns="0" tIns="0" rIns="0" bIns="0" rtlCol="0" anchor="ctr"/>
           <a:lstStyle/>
           <a:p>
-            <a:pPr algn="ctr" indent="0" marL="0">
+            <a:pPr marL="0" indent="0" algn="ctr">
               <a:buNone/>
             </a:pPr>
             <a:r>
@@ -3117,6 +3007,13 @@
             <a:prstDash val="solid"/>
           </a:ln>
         </p:spPr>
+        <p:txBody>
+          <a:bodyPr/>
+          <a:lstStyle/>
+          <a:p>
+            <a:endParaRPr lang="en-GB"/>
+          </a:p>
+        </p:txBody>
       </p:sp>
       <p:sp>
         <p:nvSpPr>
@@ -3141,7 +3038,7 @@
           </a:bodyPr>
           <a:lstStyle/>
           <a:p>
-            <a:pPr algn="l" indent="0" marL="0">
+            <a:pPr marL="0" indent="0" algn="l">
               <a:buNone/>
             </a:pPr>
             <a:r>
@@ -3182,6 +3079,13 @@
             <a:prstDash val="solid"/>
           </a:ln>
         </p:spPr>
+        <p:txBody>
+          <a:bodyPr/>
+          <a:lstStyle/>
+          <a:p>
+            <a:endParaRPr lang="en-GB"/>
+          </a:p>
+        </p:txBody>
       </p:sp>
       <p:sp>
         <p:nvSpPr>
@@ -3206,7 +3110,7 @@
           </a:bodyPr>
           <a:lstStyle/>
           <a:p>
-            <a:pPr algn="ctr" indent="0" marL="0">
+            <a:pPr marL="0" indent="0" algn="ctr">
               <a:buNone/>
             </a:pPr>
             <a:r>
@@ -3247,6 +3151,13 @@
             <a:prstDash val="solid"/>
           </a:ln>
         </p:spPr>
+        <p:txBody>
+          <a:bodyPr/>
+          <a:lstStyle/>
+          <a:p>
+            <a:endParaRPr lang="en-GB"/>
+          </a:p>
+        </p:txBody>
       </p:sp>
       <p:sp>
         <p:nvSpPr>
@@ -3271,7 +3182,7 @@
           </a:bodyPr>
           <a:lstStyle/>
           <a:p>
-            <a:pPr algn="ctr" indent="0" marL="0">
+            <a:pPr marL="0" indent="0" algn="ctr">
               <a:buNone/>
             </a:pPr>
             <a:r>
@@ -3312,6 +3223,13 @@
             <a:prstDash val="solid"/>
           </a:ln>
         </p:spPr>
+        <p:txBody>
+          <a:bodyPr/>
+          <a:lstStyle/>
+          <a:p>
+            <a:endParaRPr lang="en-GB"/>
+          </a:p>
+        </p:txBody>
       </p:sp>
       <p:sp>
         <p:nvSpPr>
@@ -3336,7 +3254,7 @@
           </a:bodyPr>
           <a:lstStyle/>
           <a:p>
-            <a:pPr algn="ctr" indent="0" marL="0">
+            <a:pPr marL="0" indent="0" algn="ctr">
               <a:buNone/>
             </a:pPr>
             <a:r>
@@ -3377,6 +3295,13 @@
             <a:prstDash val="solid"/>
           </a:ln>
         </p:spPr>
+        <p:txBody>
+          <a:bodyPr/>
+          <a:lstStyle/>
+          <a:p>
+            <a:endParaRPr lang="en-GB"/>
+          </a:p>
+        </p:txBody>
       </p:sp>
       <p:sp>
         <p:nvSpPr>
@@ -3401,7 +3326,7 @@
           </a:bodyPr>
           <a:lstStyle/>
           <a:p>
-            <a:pPr algn="ctr" indent="0" marL="0">
+            <a:pPr marL="0" indent="0" algn="ctr">
               <a:buNone/>
             </a:pPr>
             <a:r>
@@ -3442,6 +3367,13 @@
             <a:prstDash val="solid"/>
           </a:ln>
         </p:spPr>
+        <p:txBody>
+          <a:bodyPr/>
+          <a:lstStyle/>
+          <a:p>
+            <a:endParaRPr lang="en-GB"/>
+          </a:p>
+        </p:txBody>
       </p:sp>
       <p:sp>
         <p:nvSpPr>
@@ -3466,7 +3398,7 @@
           </a:bodyPr>
           <a:lstStyle/>
           <a:p>
-            <a:pPr algn="l" indent="0" marL="0">
+            <a:pPr marL="0" indent="0" algn="l">
               <a:buNone/>
             </a:pPr>
             <a:r>
@@ -3507,6 +3439,13 @@
             <a:prstDash val="solid"/>
           </a:ln>
         </p:spPr>
+        <p:txBody>
+          <a:bodyPr/>
+          <a:lstStyle/>
+          <a:p>
+            <a:endParaRPr lang="en-GB"/>
+          </a:p>
+        </p:txBody>
       </p:sp>
       <p:sp>
         <p:nvSpPr>
@@ -3531,7 +3470,7 @@
           </a:bodyPr>
           <a:lstStyle/>
           <a:p>
-            <a:pPr algn="ctr" indent="0" marL="0">
+            <a:pPr marL="0" indent="0" algn="ctr">
               <a:buNone/>
             </a:pPr>
             <a:r>
@@ -3572,6 +3511,13 @@
             <a:prstDash val="solid"/>
           </a:ln>
         </p:spPr>
+        <p:txBody>
+          <a:bodyPr/>
+          <a:lstStyle/>
+          <a:p>
+            <a:endParaRPr lang="en-GB"/>
+          </a:p>
+        </p:txBody>
       </p:sp>
       <p:sp>
         <p:nvSpPr>
@@ -3596,7 +3542,7 @@
           </a:bodyPr>
           <a:lstStyle/>
           <a:p>
-            <a:pPr algn="ctr" indent="0" marL="0">
+            <a:pPr marL="0" indent="0" algn="ctr">
               <a:buNone/>
             </a:pPr>
             <a:r>
@@ -3637,6 +3583,13 @@
             <a:prstDash val="solid"/>
           </a:ln>
         </p:spPr>
+        <p:txBody>
+          <a:bodyPr/>
+          <a:lstStyle/>
+          <a:p>
+            <a:endParaRPr lang="en-GB"/>
+          </a:p>
+        </p:txBody>
       </p:sp>
       <p:sp>
         <p:nvSpPr>
@@ -3661,7 +3614,7 @@
           </a:bodyPr>
           <a:lstStyle/>
           <a:p>
-            <a:pPr algn="ctr" indent="0" marL="0">
+            <a:pPr marL="0" indent="0" algn="ctr">
               <a:buNone/>
             </a:pPr>
             <a:r>
@@ -3702,6 +3655,13 @@
             <a:prstDash val="solid"/>
           </a:ln>
         </p:spPr>
+        <p:txBody>
+          <a:bodyPr/>
+          <a:lstStyle/>
+          <a:p>
+            <a:endParaRPr lang="en-GB"/>
+          </a:p>
+        </p:txBody>
       </p:sp>
       <p:sp>
         <p:nvSpPr>
@@ -3726,7 +3686,7 @@
           </a:bodyPr>
           <a:lstStyle/>
           <a:p>
-            <a:pPr algn="ctr" indent="0" marL="0">
+            <a:pPr marL="0" indent="0" algn="ctr">
               <a:buNone/>
             </a:pPr>
             <a:r>
@@ -3769,6 +3729,13 @@
             <a:prstDash val="solid"/>
           </a:ln>
         </p:spPr>
+        <p:txBody>
+          <a:bodyPr/>
+          <a:lstStyle/>
+          <a:p>
+            <a:endParaRPr lang="en-GB"/>
+          </a:p>
+        </p:txBody>
       </p:sp>
       <p:sp>
         <p:nvSpPr>
@@ -3791,7 +3758,7 @@
           <a:bodyPr wrap="square" lIns="0" tIns="0" rIns="0" bIns="0" rtlCol="0" anchor="ctr"/>
           <a:lstStyle/>
           <a:p>
-            <a:pPr indent="0" marL="0">
+            <a:pPr marL="0" indent="0">
               <a:buNone/>
             </a:pPr>
             <a:r>
@@ -3808,14 +3775,14 @@
       </p:sp>
       <p:pic>
         <p:nvPicPr>
-          <p:cNvPr id="45" name="Image 0" descr="/mnt/data/key_extracted_plots/18_shap_summary.png">    </p:cNvPr>
+          <p:cNvPr id="45" name="Image 0" descr="/mnt/data/key_extracted_plots/18_shap_summary.png"/>
           <p:cNvPicPr>
             <a:picLocks noChangeAspect="1"/>
           </p:cNvPicPr>
           <p:nvPr/>
         </p:nvPicPr>
         <p:blipFill>
-          <a:blip r:embed="rId1"/>
+          <a:blip r:embed="rId3"/>
           <a:stretch>
             <a:fillRect/>
           </a:stretch>
@@ -3851,7 +3818,7 @@
           <a:bodyPr wrap="square" lIns="0" tIns="0" rIns="0" bIns="0" rtlCol="0" anchor="ctr"/>
           <a:lstStyle/>
           <a:p>
-            <a:pPr algn="ctr" indent="0" marL="0">
+            <a:pPr marL="0" indent="0" algn="ctr">
               <a:buNone/>
             </a:pPr>
             <a:r>
@@ -3882,6 +3849,7 @@
         <a:solidFill>
           <a:srgbClr val="FFFFFF"/>
         </a:solidFill>
+        <a:effectLst/>
       </p:bgPr>
     </p:bg>
     <p:spTree>
@@ -3922,6 +3890,13 @@
             <a:prstDash val="solid"/>
           </a:ln>
         </p:spPr>
+        <p:txBody>
+          <a:bodyPr/>
+          <a:lstStyle/>
+          <a:p>
+            <a:endParaRPr lang="en-GB"/>
+          </a:p>
+        </p:txBody>
       </p:sp>
       <p:sp>
         <p:nvSpPr>
@@ -3944,7 +3919,7 @@
           <a:bodyPr wrap="square" lIns="0" tIns="0" rIns="0" bIns="0" rtlCol="0" anchor="ctr"/>
           <a:lstStyle/>
           <a:p>
-            <a:pPr indent="0" marL="0">
+            <a:pPr marL="0" indent="0">
               <a:buNone/>
             </a:pPr>
             <a:r>
@@ -3983,7 +3958,7 @@
           <a:bodyPr wrap="square" lIns="0" tIns="0" rIns="0" bIns="0" rtlCol="0" anchor="ctr"/>
           <a:lstStyle/>
           <a:p>
-            <a:pPr indent="0" marL="0">
+            <a:pPr marL="0" indent="0">
               <a:buNone/>
             </a:pPr>
             <a:r>
@@ -4019,7 +3994,7 @@
           <a:bodyPr wrap="square" lIns="0" tIns="0" rIns="0" bIns="0" rtlCol="0" anchor="ctr"/>
           <a:lstStyle/>
           <a:p>
-            <a:pPr indent="0" marL="0">
+            <a:pPr marL="0" indent="0">
               <a:buNone/>
             </a:pPr>
             <a:r>
@@ -4055,7 +4030,7 @@
           <a:bodyPr wrap="square" lIns="0" tIns="0" rIns="0" bIns="0" rtlCol="0" anchor="ctr"/>
           <a:lstStyle/>
           <a:p>
-            <a:pPr algn="r" indent="0" marL="0">
+            <a:pPr marL="0" indent="0" algn="r">
               <a:buNone/>
             </a:pPr>
             <a:r>
@@ -4091,7 +4066,7 @@
           <a:bodyPr wrap="square" lIns="0" tIns="0" rIns="0" bIns="0" rtlCol="0" anchor="ctr"/>
           <a:lstStyle/>
           <a:p>
-            <a:pPr indent="0" marL="0">
+            <a:pPr marL="0" indent="0">
               <a:buNone/>
             </a:pPr>
             <a:r>
@@ -4125,11 +4100,11 @@
         </p:spPr>
         <p:txBody>
           <a:bodyPr wrap="square" lIns="0" tIns="0" rIns="0" bIns="0" rtlCol="0" anchor="ctr">
-            <a:normAutofit/>
+            <a:normAutofit fontScale="92500" lnSpcReduction="20000"/>
           </a:bodyPr>
           <a:lstStyle/>
           <a:p>
-            <a:pPr indent="0" marL="0">
+            <a:pPr marL="0" indent="0">
               <a:buNone/>
             </a:pPr>
             <a:r>
@@ -4167,7 +4142,7 @@
           </a:bodyPr>
           <a:lstStyle/>
           <a:p>
-            <a:pPr indent="0" marL="0">
+            <a:pPr marL="0" indent="0">
               <a:buNone/>
             </a:pPr>
             <a:r>
@@ -4181,7 +4156,7 @@
             <a:endParaRPr lang="en-US" sz="1300" dirty="0"/>
           </a:p>
           <a:p>
-            <a:pPr indent="0" marL="0">
+            <a:pPr marL="0" indent="0">
               <a:buNone/>
             </a:pPr>
             <a:r>
@@ -4195,7 +4170,7 @@
             <a:endParaRPr lang="en-US" sz="1300" dirty="0"/>
           </a:p>
           <a:p>
-            <a:pPr indent="0" marL="0">
+            <a:pPr marL="0" indent="0">
               <a:buNone/>
             </a:pPr>
             <a:r>
@@ -4234,6 +4209,13 @@
             <a:prstDash val="solid"/>
           </a:ln>
         </p:spPr>
+        <p:txBody>
+          <a:bodyPr/>
+          <a:lstStyle/>
+          <a:p>
+            <a:endParaRPr lang="en-GB"/>
+          </a:p>
+        </p:txBody>
       </p:sp>
       <p:sp>
         <p:nvSpPr>
@@ -4263,6 +4245,13 @@
             <a:prstDash val="solid"/>
           </a:ln>
         </p:spPr>
+        <p:txBody>
+          <a:bodyPr/>
+          <a:lstStyle/>
+          <a:p>
+            <a:endParaRPr lang="en-GB"/>
+          </a:p>
+        </p:txBody>
       </p:sp>
       <p:sp>
         <p:nvSpPr>
@@ -4285,7 +4274,7 @@
           <a:bodyPr wrap="square" lIns="0" tIns="0" rIns="0" bIns="0" rtlCol="0" anchor="ctr"/>
           <a:lstStyle/>
           <a:p>
-            <a:pPr indent="0" marL="0">
+            <a:pPr marL="0" indent="0">
               <a:buNone/>
             </a:pPr>
             <a:r>
@@ -4323,7 +4312,7 @@
           </a:bodyPr>
           <a:lstStyle/>
           <a:p>
-            <a:pPr indent="0" marL="0">
+            <a:pPr marL="0" indent="0">
               <a:buNone/>
             </a:pPr>
             <a:r>
@@ -4337,7 +4326,7 @@
             <a:endParaRPr lang="en-US" sz="1260" dirty="0"/>
           </a:p>
           <a:p>
-            <a:pPr indent="0" marL="0">
+            <a:pPr marL="0" indent="0">
               <a:buNone/>
             </a:pPr>
             <a:r>
@@ -4351,7 +4340,7 @@
             <a:endParaRPr lang="en-US" sz="1260" dirty="0"/>
           </a:p>
           <a:p>
-            <a:pPr indent="0" marL="0">
+            <a:pPr marL="0" indent="0">
               <a:buNone/>
             </a:pPr>
             <a:r>
@@ -4365,7 +4354,7 @@
             <a:endParaRPr lang="en-US" sz="1260" dirty="0"/>
           </a:p>
           <a:p>
-            <a:pPr indent="0" marL="0">
+            <a:pPr marL="0" indent="0">
               <a:buNone/>
             </a:pPr>
             <a:r>
@@ -4408,6 +4397,13 @@
             <a:prstDash val="solid"/>
           </a:ln>
         </p:spPr>
+        <p:txBody>
+          <a:bodyPr/>
+          <a:lstStyle/>
+          <a:p>
+            <a:endParaRPr lang="en-GB"/>
+          </a:p>
+        </p:txBody>
       </p:sp>
       <p:sp>
         <p:nvSpPr>
@@ -4430,7 +4426,7 @@
           <a:bodyPr wrap="square" lIns="0" tIns="0" rIns="0" bIns="0" rtlCol="0" anchor="ctr"/>
           <a:lstStyle/>
           <a:p>
-            <a:pPr algn="ctr" indent="0" marL="0">
+            <a:pPr marL="0" indent="0" algn="ctr">
               <a:buNone/>
             </a:pPr>
             <a:r>
@@ -4461,6 +4457,7 @@
         <a:solidFill>
           <a:srgbClr val="FFFFFF"/>
         </a:solidFill>
+        <a:effectLst/>
       </p:bgPr>
     </p:bg>
     <p:spTree>
@@ -4501,6 +4498,13 @@
             <a:prstDash val="solid"/>
           </a:ln>
         </p:spPr>
+        <p:txBody>
+          <a:bodyPr/>
+          <a:lstStyle/>
+          <a:p>
+            <a:endParaRPr lang="en-GB"/>
+          </a:p>
+        </p:txBody>
       </p:sp>
       <p:sp>
         <p:nvSpPr>
@@ -4523,7 +4527,7 @@
           <a:bodyPr wrap="square" lIns="0" tIns="0" rIns="0" bIns="0" rtlCol="0" anchor="ctr"/>
           <a:lstStyle/>
           <a:p>
-            <a:pPr indent="0" marL="0">
+            <a:pPr marL="0" indent="0">
               <a:buNone/>
             </a:pPr>
             <a:r>
@@ -4562,7 +4566,7 @@
           <a:bodyPr wrap="square" lIns="0" tIns="0" rIns="0" bIns="0" rtlCol="0" anchor="ctr"/>
           <a:lstStyle/>
           <a:p>
-            <a:pPr indent="0" marL="0">
+            <a:pPr marL="0" indent="0">
               <a:buNone/>
             </a:pPr>
             <a:r>
@@ -4598,7 +4602,7 @@
           <a:bodyPr wrap="square" lIns="0" tIns="0" rIns="0" bIns="0" rtlCol="0" anchor="ctr"/>
           <a:lstStyle/>
           <a:p>
-            <a:pPr indent="0" marL="0">
+            <a:pPr marL="0" indent="0">
               <a:buNone/>
             </a:pPr>
             <a:r>
@@ -4634,7 +4638,7 @@
           <a:bodyPr wrap="square" lIns="0" tIns="0" rIns="0" bIns="0" rtlCol="0" anchor="ctr"/>
           <a:lstStyle/>
           <a:p>
-            <a:pPr algn="r" indent="0" marL="0">
+            <a:pPr marL="0" indent="0" algn="r">
               <a:buNone/>
             </a:pPr>
             <a:r>
@@ -4677,6 +4681,13 @@
             <a:prstDash val="solid"/>
           </a:ln>
         </p:spPr>
+        <p:txBody>
+          <a:bodyPr/>
+          <a:lstStyle/>
+          <a:p>
+            <a:endParaRPr lang="en-GB"/>
+          </a:p>
+        </p:txBody>
       </p:sp>
       <p:sp>
         <p:nvSpPr>
@@ -4702,6 +4713,13 @@
             <a:prstDash val="solid"/>
           </a:ln>
         </p:spPr>
+        <p:txBody>
+          <a:bodyPr/>
+          <a:lstStyle/>
+          <a:p>
+            <a:endParaRPr lang="en-GB"/>
+          </a:p>
+        </p:txBody>
       </p:sp>
       <p:sp>
         <p:nvSpPr>
@@ -4724,7 +4742,7 @@
           <a:bodyPr wrap="square" lIns="0" tIns="0" rIns="0" bIns="0" rtlCol="0" anchor="ctr"/>
           <a:lstStyle/>
           <a:p>
-            <a:pPr algn="ctr" indent="0" marL="0">
+            <a:pPr marL="0" indent="0" algn="ctr">
               <a:buNone/>
             </a:pPr>
             <a:r>
@@ -4760,7 +4778,7 @@
           <a:bodyPr wrap="square" lIns="0" tIns="0" rIns="0" bIns="0" rtlCol="0" anchor="ctr"/>
           <a:lstStyle/>
           <a:p>
-            <a:pPr algn="ctr" indent="0" marL="0">
+            <a:pPr marL="0" indent="0" algn="ctr">
               <a:buNone/>
             </a:pPr>
             <a:r>
@@ -4803,6 +4821,13 @@
             <a:prstDash val="solid"/>
           </a:ln>
         </p:spPr>
+        <p:txBody>
+          <a:bodyPr/>
+          <a:lstStyle/>
+          <a:p>
+            <a:endParaRPr lang="en-GB"/>
+          </a:p>
+        </p:txBody>
       </p:sp>
       <p:sp>
         <p:nvSpPr>
@@ -4828,6 +4853,13 @@
             <a:prstDash val="solid"/>
           </a:ln>
         </p:spPr>
+        <p:txBody>
+          <a:bodyPr/>
+          <a:lstStyle/>
+          <a:p>
+            <a:endParaRPr lang="en-GB"/>
+          </a:p>
+        </p:txBody>
       </p:sp>
       <p:sp>
         <p:nvSpPr>
@@ -4850,7 +4882,7 @@
           <a:bodyPr wrap="square" lIns="0" tIns="0" rIns="0" bIns="0" rtlCol="0" anchor="ctr"/>
           <a:lstStyle/>
           <a:p>
-            <a:pPr algn="ctr" indent="0" marL="0">
+            <a:pPr marL="0" indent="0" algn="ctr">
               <a:buNone/>
             </a:pPr>
             <a:r>
@@ -4886,7 +4918,7 @@
           <a:bodyPr wrap="square" lIns="0" tIns="0" rIns="0" bIns="0" rtlCol="0" anchor="ctr"/>
           <a:lstStyle/>
           <a:p>
-            <a:pPr algn="ctr" indent="0" marL="0">
+            <a:pPr marL="0" indent="0" algn="ctr">
               <a:buNone/>
             </a:pPr>
             <a:r>
@@ -4929,6 +4961,13 @@
             <a:prstDash val="solid"/>
           </a:ln>
         </p:spPr>
+        <p:txBody>
+          <a:bodyPr/>
+          <a:lstStyle/>
+          <a:p>
+            <a:endParaRPr lang="en-GB"/>
+          </a:p>
+        </p:txBody>
       </p:sp>
       <p:sp>
         <p:nvSpPr>
@@ -4954,6 +4993,13 @@
             <a:prstDash val="solid"/>
           </a:ln>
         </p:spPr>
+        <p:txBody>
+          <a:bodyPr/>
+          <a:lstStyle/>
+          <a:p>
+            <a:endParaRPr lang="en-GB"/>
+          </a:p>
+        </p:txBody>
       </p:sp>
       <p:sp>
         <p:nvSpPr>
@@ -4976,7 +5022,7 @@
           <a:bodyPr wrap="square" lIns="0" tIns="0" rIns="0" bIns="0" rtlCol="0" anchor="ctr"/>
           <a:lstStyle/>
           <a:p>
-            <a:pPr algn="ctr" indent="0" marL="0">
+            <a:pPr marL="0" indent="0" algn="ctr">
               <a:buNone/>
             </a:pPr>
             <a:r>
@@ -5012,7 +5058,7 @@
           <a:bodyPr wrap="square" lIns="0" tIns="0" rIns="0" bIns="0" rtlCol="0" anchor="ctr"/>
           <a:lstStyle/>
           <a:p>
-            <a:pPr algn="ctr" indent="0" marL="0">
+            <a:pPr marL="0" indent="0" algn="ctr">
               <a:buNone/>
             </a:pPr>
             <a:r>
@@ -5055,6 +5101,13 @@
             <a:prstDash val="solid"/>
           </a:ln>
         </p:spPr>
+        <p:txBody>
+          <a:bodyPr/>
+          <a:lstStyle/>
+          <a:p>
+            <a:endParaRPr lang="en-GB"/>
+          </a:p>
+        </p:txBody>
       </p:sp>
       <p:sp>
         <p:nvSpPr>
@@ -5077,7 +5130,7 @@
           <a:bodyPr wrap="square" lIns="0" tIns="0" rIns="0" bIns="0" rtlCol="0" anchor="ctr"/>
           <a:lstStyle/>
           <a:p>
-            <a:pPr indent="0" marL="0">
+            <a:pPr marL="0" indent="0">
               <a:buNone/>
             </a:pPr>
             <a:r>
@@ -5094,14 +5147,14 @@
       </p:sp>
       <p:pic>
         <p:nvPicPr>
-          <p:cNvPr id="21" name="Image 0" descr="/mnt/data/key_extracted_plots/02_target_distribution_count.png">    </p:cNvPr>
+          <p:cNvPr id="21" name="Image 0" descr="/mnt/data/key_extracted_plots/02_target_distribution_count.png"/>
           <p:cNvPicPr>
             <a:picLocks noChangeAspect="1"/>
           </p:cNvPicPr>
           <p:nvPr/>
         </p:nvPicPr>
         <p:blipFill>
-          <a:blip r:embed="rId1"/>
+          <a:blip r:embed="rId3"/>
           <a:stretch>
             <a:fillRect/>
           </a:stretch>
@@ -5144,6 +5197,13 @@
             <a:prstDash val="solid"/>
           </a:ln>
         </p:spPr>
+        <p:txBody>
+          <a:bodyPr/>
+          <a:lstStyle/>
+          <a:p>
+            <a:endParaRPr lang="en-GB"/>
+          </a:p>
+        </p:txBody>
       </p:sp>
       <p:sp>
         <p:nvSpPr>
@@ -5166,7 +5226,7 @@
           <a:bodyPr wrap="square" lIns="0" tIns="0" rIns="0" bIns="0" rtlCol="0" anchor="ctr"/>
           <a:lstStyle/>
           <a:p>
-            <a:pPr indent="0" marL="0">
+            <a:pPr marL="0" indent="0">
               <a:buNone/>
             </a:pPr>
             <a:r>
@@ -5183,14 +5243,14 @@
       </p:sp>
       <p:pic>
         <p:nvPicPr>
-          <p:cNvPr id="24" name="Image 1" descr="/mnt/data/key_extracted_plots/05_subscription_by_month.png">    </p:cNvPr>
+          <p:cNvPr id="24" name="Image 1" descr="/mnt/data/key_extracted_plots/05_subscription_by_month.png"/>
           <p:cNvPicPr>
             <a:picLocks noChangeAspect="1"/>
           </p:cNvPicPr>
           <p:nvPr/>
         </p:nvPicPr>
         <p:blipFill>
-          <a:blip r:embed="rId2"/>
+          <a:blip r:embed="rId4"/>
           <a:stretch>
             <a:fillRect/>
           </a:stretch>
@@ -5233,6 +5293,13 @@
             <a:prstDash val="solid"/>
           </a:ln>
         </p:spPr>
+        <p:txBody>
+          <a:bodyPr/>
+          <a:lstStyle/>
+          <a:p>
+            <a:endParaRPr lang="en-GB"/>
+          </a:p>
+        </p:txBody>
       </p:sp>
       <p:sp>
         <p:nvSpPr>
@@ -5255,31 +5322,24 @@
           <a:bodyPr wrap="square" lIns="0" tIns="0" rIns="0" bIns="0" rtlCol="0" anchor="ctr"/>
           <a:lstStyle/>
           <a:p>
-            <a:pPr indent="0" marL="0">
-              <a:buNone/>
-            </a:pPr>
-            <a:r>
-              <a:rPr lang="en-US" sz="1020" b="1" dirty="0">
-                <a:solidFill>
-                  <a:srgbClr val="12385B"/>
-                </a:solidFill>
-              </a:rPr>
-              <a:t>Subscription by previous outcome</a:t>
-            </a:r>
-            <a:endParaRPr lang="en-US" sz="1020" dirty="0"/>
+            <a:r>
+              <a:rPr lang="en-GB" sz="1050" b="1" dirty="0"/>
+              <a:t>Subscription rate based on past contact result</a:t>
+            </a:r>
+            <a:endParaRPr lang="en-GB" sz="1050" dirty="0"/>
           </a:p>
         </p:txBody>
       </p:sp>
       <p:pic>
         <p:nvPicPr>
-          <p:cNvPr id="27" name="Image 2" descr="/mnt/data/key_extracted_plots/07_subscription_by_poutcome.png">    </p:cNvPr>
+          <p:cNvPr id="27" name="Image 2" descr="/mnt/data/key_extracted_plots/07_subscription_by_poutcome.png"/>
           <p:cNvPicPr>
             <a:picLocks noChangeAspect="1"/>
           </p:cNvPicPr>
           <p:nvPr/>
         </p:nvPicPr>
         <p:blipFill>
-          <a:blip r:embed="rId3"/>
+          <a:blip r:embed="rId5"/>
           <a:stretch>
             <a:fillRect/>
           </a:stretch>
@@ -5313,11 +5373,11 @@
         </p:spPr>
         <p:txBody>
           <a:bodyPr wrap="square" lIns="0" tIns="0" rIns="0" bIns="0" rtlCol="0" anchor="ctr">
-            <a:normAutofit/>
+            <a:normAutofit fontScale="92500" lnSpcReduction="20000"/>
           </a:bodyPr>
           <a:lstStyle/>
           <a:p>
-            <a:pPr indent="0" marL="0">
+            <a:pPr marL="0" indent="0">
               <a:buNone/>
             </a:pPr>
             <a:r>
@@ -5348,6 +5408,7 @@
         <a:solidFill>
           <a:srgbClr val="FFFFFF"/>
         </a:solidFill>
+        <a:effectLst/>
       </p:bgPr>
     </p:bg>
     <p:spTree>
@@ -5388,6 +5449,13 @@
             <a:prstDash val="solid"/>
           </a:ln>
         </p:spPr>
+        <p:txBody>
+          <a:bodyPr/>
+          <a:lstStyle/>
+          <a:p>
+            <a:endParaRPr lang="en-GB"/>
+          </a:p>
+        </p:txBody>
       </p:sp>
       <p:sp>
         <p:nvSpPr>
@@ -5410,7 +5478,7 @@
           <a:bodyPr wrap="square" lIns="0" tIns="0" rIns="0" bIns="0" rtlCol="0" anchor="ctr"/>
           <a:lstStyle/>
           <a:p>
-            <a:pPr indent="0" marL="0">
+            <a:pPr marL="0" indent="0">
               <a:buNone/>
             </a:pPr>
             <a:r>
@@ -5449,7 +5517,7 @@
           <a:bodyPr wrap="square" lIns="0" tIns="0" rIns="0" bIns="0" rtlCol="0" anchor="ctr"/>
           <a:lstStyle/>
           <a:p>
-            <a:pPr indent="0" marL="0">
+            <a:pPr marL="0" indent="0">
               <a:buNone/>
             </a:pPr>
             <a:r>
@@ -5485,7 +5553,7 @@
           <a:bodyPr wrap="square" lIns="0" tIns="0" rIns="0" bIns="0" rtlCol="0" anchor="ctr"/>
           <a:lstStyle/>
           <a:p>
-            <a:pPr indent="0" marL="0">
+            <a:pPr marL="0" indent="0">
               <a:buNone/>
             </a:pPr>
             <a:r>
@@ -5521,7 +5589,7 @@
           <a:bodyPr wrap="square" lIns="0" tIns="0" rIns="0" bIns="0" rtlCol="0" anchor="ctr"/>
           <a:lstStyle/>
           <a:p>
-            <a:pPr algn="r" indent="0" marL="0">
+            <a:pPr marL="0" indent="0" algn="r">
               <a:buNone/>
             </a:pPr>
             <a:r>
@@ -5564,6 +5632,13 @@
             <a:prstDash val="solid"/>
           </a:ln>
         </p:spPr>
+        <p:txBody>
+          <a:bodyPr/>
+          <a:lstStyle/>
+          <a:p>
+            <a:endParaRPr lang="en-GB"/>
+          </a:p>
+        </p:txBody>
       </p:sp>
       <p:sp>
         <p:nvSpPr>
@@ -5586,7 +5661,7 @@
           <a:bodyPr wrap="square" lIns="0" tIns="0" rIns="0" bIns="0" rtlCol="0" anchor="ctr"/>
           <a:lstStyle/>
           <a:p>
-            <a:pPr indent="0" marL="0">
+            <a:pPr marL="0" indent="0">
               <a:buNone/>
             </a:pPr>
             <a:r>
@@ -5622,7 +5697,7 @@
           <a:bodyPr wrap="square" lIns="0" tIns="0" rIns="0" bIns="0" rtlCol="0" anchor="ctr"/>
           <a:lstStyle/>
           <a:p>
-            <a:pPr algn="ctr" indent="0" marL="0">
+            <a:pPr marL="0" indent="0" algn="ctr">
               <a:buNone/>
             </a:pPr>
             <a:r>
@@ -5660,7 +5735,7 @@
           </a:bodyPr>
           <a:lstStyle/>
           <a:p>
-            <a:pPr algn="ctr" indent="0" marL="0">
+            <a:pPr marL="0" indent="0" algn="ctr">
               <a:buNone/>
             </a:pPr>
             <a:r>
@@ -5698,6 +5773,13 @@
             <a:tailEnd type="triangle"/>
           </a:ln>
         </p:spPr>
+        <p:txBody>
+          <a:bodyPr/>
+          <a:lstStyle/>
+          <a:p>
+            <a:endParaRPr lang="en-GB"/>
+          </a:p>
+        </p:txBody>
       </p:sp>
       <p:sp>
         <p:nvSpPr>
@@ -5727,6 +5809,13 @@
             <a:prstDash val="solid"/>
           </a:ln>
         </p:spPr>
+        <p:txBody>
+          <a:bodyPr/>
+          <a:lstStyle/>
+          <a:p>
+            <a:endParaRPr lang="en-GB"/>
+          </a:p>
+        </p:txBody>
       </p:sp>
       <p:sp>
         <p:nvSpPr>
@@ -5749,7 +5838,7 @@
           <a:bodyPr wrap="square" lIns="0" tIns="0" rIns="0" bIns="0" rtlCol="0" anchor="ctr"/>
           <a:lstStyle/>
           <a:p>
-            <a:pPr indent="0" marL="0">
+            <a:pPr marL="0" indent="0">
               <a:buNone/>
             </a:pPr>
             <a:r>
@@ -5785,7 +5874,7 @@
           <a:bodyPr wrap="square" lIns="0" tIns="0" rIns="0" bIns="0" rtlCol="0" anchor="ctr"/>
           <a:lstStyle/>
           <a:p>
-            <a:pPr algn="ctr" indent="0" marL="0">
+            <a:pPr marL="0" indent="0" algn="ctr">
               <a:buNone/>
             </a:pPr>
             <a:r>
@@ -5823,7 +5912,7 @@
           </a:bodyPr>
           <a:lstStyle/>
           <a:p>
-            <a:pPr algn="ctr" indent="0" marL="0">
+            <a:pPr marL="0" indent="0" algn="ctr">
               <a:buNone/>
             </a:pPr>
             <a:r>
@@ -5861,6 +5950,13 @@
             <a:tailEnd type="triangle"/>
           </a:ln>
         </p:spPr>
+        <p:txBody>
+          <a:bodyPr/>
+          <a:lstStyle/>
+          <a:p>
+            <a:endParaRPr lang="en-GB"/>
+          </a:p>
+        </p:txBody>
       </p:sp>
       <p:sp>
         <p:nvSpPr>
@@ -5890,6 +5986,13 @@
             <a:prstDash val="solid"/>
           </a:ln>
         </p:spPr>
+        <p:txBody>
+          <a:bodyPr/>
+          <a:lstStyle/>
+          <a:p>
+            <a:endParaRPr lang="en-GB"/>
+          </a:p>
+        </p:txBody>
       </p:sp>
       <p:sp>
         <p:nvSpPr>
@@ -5912,7 +6015,7 @@
           <a:bodyPr wrap="square" lIns="0" tIns="0" rIns="0" bIns="0" rtlCol="0" anchor="ctr"/>
           <a:lstStyle/>
           <a:p>
-            <a:pPr indent="0" marL="0">
+            <a:pPr marL="0" indent="0">
               <a:buNone/>
             </a:pPr>
             <a:r>
@@ -5948,7 +6051,7 @@
           <a:bodyPr wrap="square" lIns="0" tIns="0" rIns="0" bIns="0" rtlCol="0" anchor="ctr"/>
           <a:lstStyle/>
           <a:p>
-            <a:pPr algn="ctr" indent="0" marL="0">
+            <a:pPr marL="0" indent="0" algn="ctr">
               <a:buNone/>
             </a:pPr>
             <a:r>
@@ -5986,7 +6089,7 @@
           </a:bodyPr>
           <a:lstStyle/>
           <a:p>
-            <a:pPr algn="ctr" indent="0" marL="0">
+            <a:pPr marL="0" indent="0" algn="ctr">
               <a:buNone/>
             </a:pPr>
             <a:r>
@@ -6024,6 +6127,13 @@
             <a:tailEnd type="triangle"/>
           </a:ln>
         </p:spPr>
+        <p:txBody>
+          <a:bodyPr/>
+          <a:lstStyle/>
+          <a:p>
+            <a:endParaRPr lang="en-GB"/>
+          </a:p>
+        </p:txBody>
       </p:sp>
       <p:sp>
         <p:nvSpPr>
@@ -6053,6 +6163,13 @@
             <a:prstDash val="solid"/>
           </a:ln>
         </p:spPr>
+        <p:txBody>
+          <a:bodyPr/>
+          <a:lstStyle/>
+          <a:p>
+            <a:endParaRPr lang="en-GB"/>
+          </a:p>
+        </p:txBody>
       </p:sp>
       <p:sp>
         <p:nvSpPr>
@@ -6075,7 +6192,7 @@
           <a:bodyPr wrap="square" lIns="0" tIns="0" rIns="0" bIns="0" rtlCol="0" anchor="ctr"/>
           <a:lstStyle/>
           <a:p>
-            <a:pPr indent="0" marL="0">
+            <a:pPr marL="0" indent="0">
               <a:buNone/>
             </a:pPr>
             <a:r>
@@ -6111,7 +6228,7 @@
           <a:bodyPr wrap="square" lIns="0" tIns="0" rIns="0" bIns="0" rtlCol="0" anchor="ctr"/>
           <a:lstStyle/>
           <a:p>
-            <a:pPr algn="ctr" indent="0" marL="0">
+            <a:pPr marL="0" indent="0" algn="ctr">
               <a:buNone/>
             </a:pPr>
             <a:r>
@@ -6149,7 +6266,7 @@
           </a:bodyPr>
           <a:lstStyle/>
           <a:p>
-            <a:pPr algn="ctr" indent="0" marL="0">
+            <a:pPr marL="0" indent="0" algn="ctr">
               <a:buNone/>
             </a:pPr>
             <a:r>
@@ -6187,6 +6304,13 @@
             <a:tailEnd type="triangle"/>
           </a:ln>
         </p:spPr>
+        <p:txBody>
+          <a:bodyPr/>
+          <a:lstStyle/>
+          <a:p>
+            <a:endParaRPr lang="en-GB"/>
+          </a:p>
+        </p:txBody>
       </p:sp>
       <p:sp>
         <p:nvSpPr>
@@ -6216,6 +6340,13 @@
             <a:prstDash val="solid"/>
           </a:ln>
         </p:spPr>
+        <p:txBody>
+          <a:bodyPr/>
+          <a:lstStyle/>
+          <a:p>
+            <a:endParaRPr lang="en-GB"/>
+          </a:p>
+        </p:txBody>
       </p:sp>
       <p:sp>
         <p:nvSpPr>
@@ -6238,7 +6369,7 @@
           <a:bodyPr wrap="square" lIns="0" tIns="0" rIns="0" bIns="0" rtlCol="0" anchor="ctr"/>
           <a:lstStyle/>
           <a:p>
-            <a:pPr indent="0" marL="0">
+            <a:pPr marL="0" indent="0">
               <a:buNone/>
             </a:pPr>
             <a:r>
@@ -6274,7 +6405,7 @@
           <a:bodyPr wrap="square" lIns="0" tIns="0" rIns="0" bIns="0" rtlCol="0" anchor="ctr"/>
           <a:lstStyle/>
           <a:p>
-            <a:pPr algn="ctr" indent="0" marL="0">
+            <a:pPr marL="0" indent="0" algn="ctr">
               <a:buNone/>
             </a:pPr>
             <a:r>
@@ -6312,7 +6443,7 @@
           </a:bodyPr>
           <a:lstStyle/>
           <a:p>
-            <a:pPr algn="ctr" indent="0" marL="0">
+            <a:pPr marL="0" indent="0" algn="ctr">
               <a:buNone/>
             </a:pPr>
             <a:r>
@@ -6348,7 +6479,7 @@
           <a:bodyPr wrap="square" lIns="0" tIns="0" rIns="0" bIns="0" rtlCol="0" anchor="ctr"/>
           <a:lstStyle/>
           <a:p>
-            <a:pPr indent="0" marL="0">
+            <a:pPr marL="0" indent="0">
               <a:buNone/>
             </a:pPr>
             <a:r>
@@ -6386,7 +6517,7 @@
           </a:bodyPr>
           <a:lstStyle/>
           <a:p>
-            <a:pPr indent="0" marL="0">
+            <a:pPr marL="0" indent="0">
               <a:buNone/>
             </a:pPr>
             <a:r>
@@ -6429,6 +6560,13 @@
             <a:prstDash val="solid"/>
           </a:ln>
         </p:spPr>
+        <p:txBody>
+          <a:bodyPr/>
+          <a:lstStyle/>
+          <a:p>
+            <a:endParaRPr lang="en-GB"/>
+          </a:p>
+        </p:txBody>
       </p:sp>
       <p:sp>
         <p:nvSpPr>
@@ -6451,7 +6589,7 @@
           <a:bodyPr wrap="square" lIns="0" tIns="0" rIns="0" bIns="0" rtlCol="0" anchor="ctr"/>
           <a:lstStyle/>
           <a:p>
-            <a:pPr indent="0" marL="0">
+            <a:pPr marL="0" indent="0">
               <a:buNone/>
             </a:pPr>
             <a:r>
@@ -6489,7 +6627,7 @@
           </a:bodyPr>
           <a:lstStyle/>
           <a:p>
-            <a:pPr indent="0" marL="0">
+            <a:pPr marL="0" indent="0">
               <a:buNone/>
             </a:pPr>
             <a:r>
@@ -6520,6 +6658,7 @@
         <a:solidFill>
           <a:srgbClr val="FFFFFF"/>
         </a:solidFill>
+        <a:effectLst/>
       </p:bgPr>
     </p:bg>
     <p:spTree>
@@ -6560,6 +6699,13 @@
             <a:prstDash val="solid"/>
           </a:ln>
         </p:spPr>
+        <p:txBody>
+          <a:bodyPr/>
+          <a:lstStyle/>
+          <a:p>
+            <a:endParaRPr lang="en-GB"/>
+          </a:p>
+        </p:txBody>
       </p:sp>
       <p:sp>
         <p:nvSpPr>
@@ -6582,7 +6728,7 @@
           <a:bodyPr wrap="square" lIns="0" tIns="0" rIns="0" bIns="0" rtlCol="0" anchor="ctr"/>
           <a:lstStyle/>
           <a:p>
-            <a:pPr indent="0" marL="0">
+            <a:pPr marL="0" indent="0">
               <a:buNone/>
             </a:pPr>
             <a:r>
@@ -6621,7 +6767,7 @@
           <a:bodyPr wrap="square" lIns="0" tIns="0" rIns="0" bIns="0" rtlCol="0" anchor="ctr"/>
           <a:lstStyle/>
           <a:p>
-            <a:pPr indent="0" marL="0">
+            <a:pPr marL="0" indent="0">
               <a:buNone/>
             </a:pPr>
             <a:r>
@@ -6657,7 +6803,7 @@
           <a:bodyPr wrap="square" lIns="0" tIns="0" rIns="0" bIns="0" rtlCol="0" anchor="ctr"/>
           <a:lstStyle/>
           <a:p>
-            <a:pPr indent="0" marL="0">
+            <a:pPr marL="0" indent="0">
               <a:buNone/>
             </a:pPr>
             <a:r>
@@ -6693,7 +6839,7 @@
           <a:bodyPr wrap="square" lIns="0" tIns="0" rIns="0" bIns="0" rtlCol="0" anchor="ctr"/>
           <a:lstStyle/>
           <a:p>
-            <a:pPr algn="r" indent="0" marL="0">
+            <a:pPr marL="0" indent="0" algn="r">
               <a:buNone/>
             </a:pPr>
             <a:r>
@@ -6736,6 +6882,13 @@
             <a:prstDash val="solid"/>
           </a:ln>
         </p:spPr>
+        <p:txBody>
+          <a:bodyPr/>
+          <a:lstStyle/>
+          <a:p>
+            <a:endParaRPr lang="en-GB"/>
+          </a:p>
+        </p:txBody>
       </p:sp>
       <p:sp>
         <p:nvSpPr>
@@ -6758,7 +6911,7 @@
           <a:bodyPr wrap="square" lIns="0" tIns="0" rIns="0" bIns="0" rtlCol="0" anchor="ctr"/>
           <a:lstStyle/>
           <a:p>
-            <a:pPr indent="0" marL="0">
+            <a:pPr marL="0" indent="0">
               <a:buNone/>
             </a:pPr>
             <a:r>
@@ -6796,7 +6949,7 @@
           </a:bodyPr>
           <a:lstStyle/>
           <a:p>
-            <a:pPr indent="0" marL="0">
+            <a:pPr marL="0" indent="0">
               <a:buNone/>
             </a:pPr>
             <a:r>
@@ -6810,7 +6963,7 @@
             <a:endParaRPr lang="en-US" sz="1250" dirty="0"/>
           </a:p>
           <a:p>
-            <a:pPr indent="0" marL="0">
+            <a:pPr marL="0" indent="0">
               <a:buNone/>
             </a:pPr>
             <a:r>
@@ -6824,7 +6977,7 @@
             <a:endParaRPr lang="en-US" sz="1250" dirty="0"/>
           </a:p>
           <a:p>
-            <a:pPr indent="0" marL="0">
+            <a:pPr marL="0" indent="0">
               <a:buNone/>
             </a:pPr>
             <a:r>
@@ -6838,7 +6991,7 @@
             <a:endParaRPr lang="en-US" sz="1250" dirty="0"/>
           </a:p>
           <a:p>
-            <a:pPr indent="0" marL="0">
+            <a:pPr marL="0" indent="0">
               <a:buNone/>
             </a:pPr>
             <a:r>
@@ -6881,6 +7034,13 @@
             <a:prstDash val="solid"/>
           </a:ln>
         </p:spPr>
+        <p:txBody>
+          <a:bodyPr/>
+          <a:lstStyle/>
+          <a:p>
+            <a:endParaRPr lang="en-GB"/>
+          </a:p>
+        </p:txBody>
       </p:sp>
       <p:sp>
         <p:nvSpPr>
@@ -6906,6 +7066,13 @@
             <a:prstDash val="solid"/>
           </a:ln>
         </p:spPr>
+        <p:txBody>
+          <a:bodyPr/>
+          <a:lstStyle/>
+          <a:p>
+            <a:endParaRPr lang="en-GB"/>
+          </a:p>
+        </p:txBody>
       </p:sp>
       <p:sp>
         <p:nvSpPr>
@@ -6928,7 +7095,7 @@
           <a:bodyPr wrap="square" lIns="0" tIns="0" rIns="0" bIns="0" rtlCol="0" anchor="ctr"/>
           <a:lstStyle/>
           <a:p>
-            <a:pPr algn="ctr" indent="0" marL="0">
+            <a:pPr marL="0" indent="0" algn="ctr">
               <a:buNone/>
             </a:pPr>
             <a:r>
@@ -6964,7 +7131,7 @@
           <a:bodyPr wrap="square" lIns="0" tIns="0" rIns="0" bIns="0" rtlCol="0" anchor="ctr"/>
           <a:lstStyle/>
           <a:p>
-            <a:pPr algn="ctr" indent="0" marL="0">
+            <a:pPr marL="0" indent="0" algn="ctr">
               <a:buNone/>
             </a:pPr>
             <a:r>
@@ -7007,6 +7174,13 @@
             <a:prstDash val="solid"/>
           </a:ln>
         </p:spPr>
+        <p:txBody>
+          <a:bodyPr/>
+          <a:lstStyle/>
+          <a:p>
+            <a:endParaRPr lang="en-GB"/>
+          </a:p>
+        </p:txBody>
       </p:sp>
       <p:sp>
         <p:nvSpPr>
@@ -7029,7 +7203,7 @@
           <a:bodyPr wrap="square" lIns="0" tIns="0" rIns="0" bIns="0" rtlCol="0" anchor="ctr"/>
           <a:lstStyle/>
           <a:p>
-            <a:pPr indent="0" marL="0">
+            <a:pPr marL="0" indent="0">
               <a:buNone/>
             </a:pPr>
             <a:r>
@@ -7067,7 +7241,7 @@
           </a:bodyPr>
           <a:lstStyle/>
           <a:p>
-            <a:pPr indent="0" marL="0">
+            <a:pPr marL="0" indent="0">
               <a:buNone/>
             </a:pPr>
             <a:r>
@@ -7081,7 +7255,7 @@
             <a:endParaRPr lang="en-US" sz="1250" dirty="0"/>
           </a:p>
           <a:p>
-            <a:pPr indent="0" marL="0">
+            <a:pPr marL="0" indent="0">
               <a:buNone/>
             </a:pPr>
             <a:r>
@@ -7095,7 +7269,7 @@
             <a:endParaRPr lang="en-US" sz="1250" dirty="0"/>
           </a:p>
           <a:p>
-            <a:pPr indent="0" marL="0">
+            <a:pPr marL="0" indent="0">
               <a:buNone/>
             </a:pPr>
             <a:r>
@@ -7138,6 +7312,13 @@
             <a:prstDash val="solid"/>
           </a:ln>
         </p:spPr>
+        <p:txBody>
+          <a:bodyPr/>
+          <a:lstStyle/>
+          <a:p>
+            <a:endParaRPr lang="en-GB"/>
+          </a:p>
+        </p:txBody>
       </p:sp>
       <p:sp>
         <p:nvSpPr>
@@ -7163,6 +7344,13 @@
             <a:prstDash val="solid"/>
           </a:ln>
         </p:spPr>
+        <p:txBody>
+          <a:bodyPr/>
+          <a:lstStyle/>
+          <a:p>
+            <a:endParaRPr lang="en-GB"/>
+          </a:p>
+        </p:txBody>
       </p:sp>
       <p:sp>
         <p:nvSpPr>
@@ -7185,7 +7373,7 @@
           <a:bodyPr wrap="square" lIns="0" tIns="0" rIns="0" bIns="0" rtlCol="0" anchor="ctr"/>
           <a:lstStyle/>
           <a:p>
-            <a:pPr algn="ctr" indent="0" marL="0">
+            <a:pPr marL="0" indent="0" algn="ctr">
               <a:buNone/>
             </a:pPr>
             <a:r>
@@ -7221,7 +7409,7 @@
           <a:bodyPr wrap="square" lIns="0" tIns="0" rIns="0" bIns="0" rtlCol="0" anchor="ctr"/>
           <a:lstStyle/>
           <a:p>
-            <a:pPr algn="ctr" indent="0" marL="0">
+            <a:pPr marL="0" indent="0" algn="ctr">
               <a:buNone/>
             </a:pPr>
             <a:r>
@@ -7264,6 +7452,13 @@
             <a:prstDash val="solid"/>
           </a:ln>
         </p:spPr>
+        <p:txBody>
+          <a:bodyPr/>
+          <a:lstStyle/>
+          <a:p>
+            <a:endParaRPr lang="en-GB"/>
+          </a:p>
+        </p:txBody>
       </p:sp>
       <p:sp>
         <p:nvSpPr>
@@ -7286,7 +7481,7 @@
           <a:bodyPr wrap="square" lIns="0" tIns="0" rIns="0" bIns="0" rtlCol="0" anchor="ctr"/>
           <a:lstStyle/>
           <a:p>
-            <a:pPr indent="0" marL="0">
+            <a:pPr marL="0" indent="0">
               <a:buNone/>
             </a:pPr>
             <a:r>
@@ -7324,7 +7519,7 @@
           </a:bodyPr>
           <a:lstStyle/>
           <a:p>
-            <a:pPr indent="0" marL="0">
+            <a:pPr marL="0" indent="0">
               <a:buNone/>
             </a:pPr>
             <a:r>
@@ -7338,7 +7533,7 @@
             <a:endParaRPr lang="en-US" sz="1250" dirty="0"/>
           </a:p>
           <a:p>
-            <a:pPr indent="0" marL="0">
+            <a:pPr marL="0" indent="0">
               <a:buNone/>
             </a:pPr>
             <a:r>
@@ -7352,7 +7547,7 @@
             <a:endParaRPr lang="en-US" sz="1250" dirty="0"/>
           </a:p>
           <a:p>
-            <a:pPr indent="0" marL="0">
+            <a:pPr marL="0" indent="0">
               <a:buNone/>
             </a:pPr>
             <a:r>
@@ -7395,6 +7590,13 @@
             <a:prstDash val="solid"/>
           </a:ln>
         </p:spPr>
+        <p:txBody>
+          <a:bodyPr/>
+          <a:lstStyle/>
+          <a:p>
+            <a:endParaRPr lang="en-GB"/>
+          </a:p>
+        </p:txBody>
       </p:sp>
       <p:sp>
         <p:nvSpPr>
@@ -7420,6 +7622,13 @@
             <a:prstDash val="solid"/>
           </a:ln>
         </p:spPr>
+        <p:txBody>
+          <a:bodyPr/>
+          <a:lstStyle/>
+          <a:p>
+            <a:endParaRPr lang="en-GB"/>
+          </a:p>
+        </p:txBody>
       </p:sp>
       <p:sp>
         <p:nvSpPr>
@@ -7442,7 +7651,7 @@
           <a:bodyPr wrap="square" lIns="0" tIns="0" rIns="0" bIns="0" rtlCol="0" anchor="ctr"/>
           <a:lstStyle/>
           <a:p>
-            <a:pPr algn="ctr" indent="0" marL="0">
+            <a:pPr marL="0" indent="0" algn="ctr">
               <a:buNone/>
             </a:pPr>
             <a:r>
@@ -7478,7 +7687,7 @@
           <a:bodyPr wrap="square" lIns="0" tIns="0" rIns="0" bIns="0" rtlCol="0" anchor="ctr"/>
           <a:lstStyle/>
           <a:p>
-            <a:pPr algn="ctr" indent="0" marL="0">
+            <a:pPr marL="0" indent="0" algn="ctr">
               <a:buNone/>
             </a:pPr>
             <a:r>
@@ -7514,7 +7723,7 @@
           <a:bodyPr wrap="square" lIns="0" tIns="0" rIns="0" bIns="0" rtlCol="0" anchor="ctr"/>
           <a:lstStyle/>
           <a:p>
-            <a:pPr algn="ctr" indent="0" marL="0">
+            <a:pPr marL="0" indent="0" algn="ctr">
               <a:buNone/>
             </a:pPr>
             <a:r>
@@ -7545,6 +7754,7 @@
         <a:solidFill>
           <a:srgbClr val="FFFFFF"/>
         </a:solidFill>
+        <a:effectLst/>
       </p:bgPr>
     </p:bg>
     <p:spTree>
@@ -7585,6 +7795,13 @@
             <a:prstDash val="solid"/>
           </a:ln>
         </p:spPr>
+        <p:txBody>
+          <a:bodyPr/>
+          <a:lstStyle/>
+          <a:p>
+            <a:endParaRPr lang="en-GB"/>
+          </a:p>
+        </p:txBody>
       </p:sp>
       <p:sp>
         <p:nvSpPr>
@@ -7607,7 +7824,7 @@
           <a:bodyPr wrap="square" lIns="0" tIns="0" rIns="0" bIns="0" rtlCol="0" anchor="ctr"/>
           <a:lstStyle/>
           <a:p>
-            <a:pPr indent="0" marL="0">
+            <a:pPr marL="0" indent="0">
               <a:buNone/>
             </a:pPr>
             <a:r>
@@ -7646,7 +7863,7 @@
           <a:bodyPr wrap="square" lIns="0" tIns="0" rIns="0" bIns="0" rtlCol="0" anchor="ctr"/>
           <a:lstStyle/>
           <a:p>
-            <a:pPr indent="0" marL="0">
+            <a:pPr marL="0" indent="0">
               <a:buNone/>
             </a:pPr>
             <a:r>
@@ -7682,7 +7899,7 @@
           <a:bodyPr wrap="square" lIns="0" tIns="0" rIns="0" bIns="0" rtlCol="0" anchor="ctr"/>
           <a:lstStyle/>
           <a:p>
-            <a:pPr indent="0" marL="0">
+            <a:pPr marL="0" indent="0">
               <a:buNone/>
             </a:pPr>
             <a:r>
@@ -7718,7 +7935,7 @@
           <a:bodyPr wrap="square" lIns="0" tIns="0" rIns="0" bIns="0" rtlCol="0" anchor="ctr"/>
           <a:lstStyle/>
           <a:p>
-            <a:pPr algn="r" indent="0" marL="0">
+            <a:pPr marL="0" indent="0" algn="r">
               <a:buNone/>
             </a:pPr>
             <a:r>
@@ -7757,6 +7974,13 @@
             <a:prstDash val="solid"/>
           </a:ln>
         </p:spPr>
+        <p:txBody>
+          <a:bodyPr/>
+          <a:lstStyle/>
+          <a:p>
+            <a:endParaRPr lang="en-GB"/>
+          </a:p>
+        </p:txBody>
       </p:sp>
       <p:sp>
         <p:nvSpPr>
@@ -7779,7 +8003,7 @@
           <a:bodyPr wrap="square" lIns="0" tIns="0" rIns="0" bIns="0" rtlCol="0" anchor="ctr"/>
           <a:lstStyle/>
           <a:p>
-            <a:pPr algn="ctr" indent="0" marL="0">
+            <a:pPr marL="0" indent="0" algn="ctr">
               <a:buNone/>
             </a:pPr>
             <a:r>
@@ -7818,6 +8042,13 @@
             <a:prstDash val="solid"/>
           </a:ln>
         </p:spPr>
+        <p:txBody>
+          <a:bodyPr/>
+          <a:lstStyle/>
+          <a:p>
+            <a:endParaRPr lang="en-GB"/>
+          </a:p>
+        </p:txBody>
       </p:sp>
       <p:sp>
         <p:nvSpPr>
@@ -7840,7 +8071,7 @@
           <a:bodyPr wrap="square" lIns="0" tIns="0" rIns="0" bIns="0" rtlCol="0" anchor="ctr"/>
           <a:lstStyle/>
           <a:p>
-            <a:pPr algn="ctr" indent="0" marL="0">
+            <a:pPr marL="0" indent="0" algn="ctr">
               <a:buNone/>
             </a:pPr>
             <a:r>
@@ -7879,6 +8110,13 @@
             <a:prstDash val="solid"/>
           </a:ln>
         </p:spPr>
+        <p:txBody>
+          <a:bodyPr/>
+          <a:lstStyle/>
+          <a:p>
+            <a:endParaRPr lang="en-GB"/>
+          </a:p>
+        </p:txBody>
       </p:sp>
       <p:sp>
         <p:nvSpPr>
@@ -7901,7 +8139,7 @@
           <a:bodyPr wrap="square" lIns="0" tIns="0" rIns="0" bIns="0" rtlCol="0" anchor="ctr"/>
           <a:lstStyle/>
           <a:p>
-            <a:pPr algn="ctr" indent="0" marL="0">
+            <a:pPr marL="0" indent="0" algn="ctr">
               <a:buNone/>
             </a:pPr>
             <a:r>
@@ -7940,6 +8178,13 @@
             <a:prstDash val="solid"/>
           </a:ln>
         </p:spPr>
+        <p:txBody>
+          <a:bodyPr/>
+          <a:lstStyle/>
+          <a:p>
+            <a:endParaRPr lang="en-GB"/>
+          </a:p>
+        </p:txBody>
       </p:sp>
       <p:sp>
         <p:nvSpPr>
@@ -7962,7 +8207,7 @@
           <a:bodyPr wrap="square" lIns="0" tIns="0" rIns="0" bIns="0" rtlCol="0" anchor="ctr"/>
           <a:lstStyle/>
           <a:p>
-            <a:pPr algn="ctr" indent="0" marL="0">
+            <a:pPr marL="0" indent="0" algn="ctr">
               <a:buNone/>
             </a:pPr>
             <a:r>
@@ -8001,6 +8246,13 @@
             <a:prstDash val="solid"/>
           </a:ln>
         </p:spPr>
+        <p:txBody>
+          <a:bodyPr/>
+          <a:lstStyle/>
+          <a:p>
+            <a:endParaRPr lang="en-GB"/>
+          </a:p>
+        </p:txBody>
       </p:sp>
       <p:sp>
         <p:nvSpPr>
@@ -8023,7 +8275,7 @@
           <a:bodyPr wrap="square" lIns="0" tIns="0" rIns="0" bIns="0" rtlCol="0" anchor="ctr"/>
           <a:lstStyle/>
           <a:p>
-            <a:pPr algn="ctr" indent="0" marL="0">
+            <a:pPr marL="0" indent="0" algn="ctr">
               <a:buNone/>
             </a:pPr>
             <a:r>
@@ -8062,6 +8314,13 @@
             <a:prstDash val="solid"/>
           </a:ln>
         </p:spPr>
+        <p:txBody>
+          <a:bodyPr/>
+          <a:lstStyle/>
+          <a:p>
+            <a:endParaRPr lang="en-GB"/>
+          </a:p>
+        </p:txBody>
       </p:sp>
       <p:sp>
         <p:nvSpPr>
@@ -8084,7 +8343,7 @@
           <a:bodyPr wrap="square" lIns="0" tIns="0" rIns="0" bIns="0" rtlCol="0" anchor="ctr"/>
           <a:lstStyle/>
           <a:p>
-            <a:pPr algn="ctr" indent="0" marL="0">
+            <a:pPr marL="0" indent="0" algn="ctr">
               <a:buNone/>
             </a:pPr>
             <a:r>
@@ -8123,6 +8382,13 @@
             <a:prstDash val="solid"/>
           </a:ln>
         </p:spPr>
+        <p:txBody>
+          <a:bodyPr/>
+          <a:lstStyle/>
+          <a:p>
+            <a:endParaRPr lang="en-GB"/>
+          </a:p>
+        </p:txBody>
       </p:sp>
       <p:sp>
         <p:nvSpPr>
@@ -8145,7 +8411,7 @@
           <a:bodyPr wrap="square" lIns="0" tIns="0" rIns="0" bIns="0" rtlCol="0" anchor="ctr"/>
           <a:lstStyle/>
           <a:p>
-            <a:pPr algn="ctr" indent="0" marL="0">
+            <a:pPr marL="0" indent="0" algn="ctr">
               <a:buNone/>
             </a:pPr>
             <a:r>
@@ -8184,6 +8450,13 @@
             <a:prstDash val="solid"/>
           </a:ln>
         </p:spPr>
+        <p:txBody>
+          <a:bodyPr/>
+          <a:lstStyle/>
+          <a:p>
+            <a:endParaRPr lang="en-GB"/>
+          </a:p>
+        </p:txBody>
       </p:sp>
       <p:sp>
         <p:nvSpPr>
@@ -8206,7 +8479,7 @@
           <a:bodyPr wrap="square" lIns="0" tIns="0" rIns="0" bIns="0" rtlCol="0" anchor="ctr"/>
           <a:lstStyle/>
           <a:p>
-            <a:pPr algn="ctr" indent="0" marL="0">
+            <a:pPr marL="0" indent="0" algn="ctr">
               <a:buNone/>
             </a:pPr>
             <a:r>
@@ -8247,6 +8520,13 @@
             <a:prstDash val="solid"/>
           </a:ln>
         </p:spPr>
+        <p:txBody>
+          <a:bodyPr/>
+          <a:lstStyle/>
+          <a:p>
+            <a:endParaRPr lang="en-GB"/>
+          </a:p>
+        </p:txBody>
       </p:sp>
       <p:sp>
         <p:nvSpPr>
@@ -8271,7 +8551,7 @@
           </a:bodyPr>
           <a:lstStyle/>
           <a:p>
-            <a:pPr algn="l" indent="0" marL="0">
+            <a:pPr marL="0" indent="0" algn="l">
               <a:buNone/>
             </a:pPr>
             <a:r>
@@ -8312,6 +8592,13 @@
             <a:prstDash val="solid"/>
           </a:ln>
         </p:spPr>
+        <p:txBody>
+          <a:bodyPr/>
+          <a:lstStyle/>
+          <a:p>
+            <a:endParaRPr lang="en-GB"/>
+          </a:p>
+        </p:txBody>
       </p:sp>
       <p:sp>
         <p:nvSpPr>
@@ -8336,7 +8623,7 @@
           </a:bodyPr>
           <a:lstStyle/>
           <a:p>
-            <a:pPr algn="ctr" indent="0" marL="0">
+            <a:pPr marL="0" indent="0" algn="ctr">
               <a:buNone/>
             </a:pPr>
             <a:r>
@@ -8377,6 +8664,13 @@
             <a:prstDash val="solid"/>
           </a:ln>
         </p:spPr>
+        <p:txBody>
+          <a:bodyPr/>
+          <a:lstStyle/>
+          <a:p>
+            <a:endParaRPr lang="en-GB"/>
+          </a:p>
+        </p:txBody>
       </p:sp>
       <p:sp>
         <p:nvSpPr>
@@ -8401,7 +8695,7 @@
           </a:bodyPr>
           <a:lstStyle/>
           <a:p>
-            <a:pPr algn="ctr" indent="0" marL="0">
+            <a:pPr marL="0" indent="0" algn="ctr">
               <a:buNone/>
             </a:pPr>
             <a:r>
@@ -8442,6 +8736,13 @@
             <a:prstDash val="solid"/>
           </a:ln>
         </p:spPr>
+        <p:txBody>
+          <a:bodyPr/>
+          <a:lstStyle/>
+          <a:p>
+            <a:endParaRPr lang="en-GB"/>
+          </a:p>
+        </p:txBody>
       </p:sp>
       <p:sp>
         <p:nvSpPr>
@@ -8466,7 +8767,7 @@
           </a:bodyPr>
           <a:lstStyle/>
           <a:p>
-            <a:pPr algn="ctr" indent="0" marL="0">
+            <a:pPr marL="0" indent="0" algn="ctr">
               <a:buNone/>
             </a:pPr>
             <a:r>
@@ -8507,6 +8808,13 @@
             <a:prstDash val="solid"/>
           </a:ln>
         </p:spPr>
+        <p:txBody>
+          <a:bodyPr/>
+          <a:lstStyle/>
+          <a:p>
+            <a:endParaRPr lang="en-GB"/>
+          </a:p>
+        </p:txBody>
       </p:sp>
       <p:sp>
         <p:nvSpPr>
@@ -8531,7 +8839,7 @@
           </a:bodyPr>
           <a:lstStyle/>
           <a:p>
-            <a:pPr algn="ctr" indent="0" marL="0">
+            <a:pPr marL="0" indent="0" algn="ctr">
               <a:buNone/>
             </a:pPr>
             <a:r>
@@ -8572,6 +8880,13 @@
             <a:prstDash val="solid"/>
           </a:ln>
         </p:spPr>
+        <p:txBody>
+          <a:bodyPr/>
+          <a:lstStyle/>
+          <a:p>
+            <a:endParaRPr lang="en-GB"/>
+          </a:p>
+        </p:txBody>
       </p:sp>
       <p:sp>
         <p:nvSpPr>
@@ -8596,7 +8911,7 @@
           </a:bodyPr>
           <a:lstStyle/>
           <a:p>
-            <a:pPr algn="ctr" indent="0" marL="0">
+            <a:pPr marL="0" indent="0" algn="ctr">
               <a:buNone/>
             </a:pPr>
             <a:r>
@@ -8637,6 +8952,13 @@
             <a:prstDash val="solid"/>
           </a:ln>
         </p:spPr>
+        <p:txBody>
+          <a:bodyPr/>
+          <a:lstStyle/>
+          <a:p>
+            <a:endParaRPr lang="en-GB"/>
+          </a:p>
+        </p:txBody>
       </p:sp>
       <p:sp>
         <p:nvSpPr>
@@ -8661,7 +8983,7 @@
           </a:bodyPr>
           <a:lstStyle/>
           <a:p>
-            <a:pPr algn="ctr" indent="0" marL="0">
+            <a:pPr marL="0" indent="0" algn="ctr">
               <a:buNone/>
             </a:pPr>
             <a:r>
@@ -8702,6 +9024,13 @@
             <a:prstDash val="solid"/>
           </a:ln>
         </p:spPr>
+        <p:txBody>
+          <a:bodyPr/>
+          <a:lstStyle/>
+          <a:p>
+            <a:endParaRPr lang="en-GB"/>
+          </a:p>
+        </p:txBody>
       </p:sp>
       <p:sp>
         <p:nvSpPr>
@@ -8726,7 +9055,7 @@
           </a:bodyPr>
           <a:lstStyle/>
           <a:p>
-            <a:pPr algn="ctr" indent="0" marL="0">
+            <a:pPr marL="0" indent="0" algn="ctr">
               <a:buNone/>
             </a:pPr>
             <a:r>
@@ -8767,6 +9096,13 @@
             <a:prstDash val="solid"/>
           </a:ln>
         </p:spPr>
+        <p:txBody>
+          <a:bodyPr/>
+          <a:lstStyle/>
+          <a:p>
+            <a:endParaRPr lang="en-GB"/>
+          </a:p>
+        </p:txBody>
       </p:sp>
       <p:sp>
         <p:nvSpPr>
@@ -8791,7 +9127,7 @@
           </a:bodyPr>
           <a:lstStyle/>
           <a:p>
-            <a:pPr algn="l" indent="0" marL="0">
+            <a:pPr marL="0" indent="0" algn="l">
               <a:buNone/>
             </a:pPr>
             <a:r>
@@ -8832,6 +9168,13 @@
             <a:prstDash val="solid"/>
           </a:ln>
         </p:spPr>
+        <p:txBody>
+          <a:bodyPr/>
+          <a:lstStyle/>
+          <a:p>
+            <a:endParaRPr lang="en-GB"/>
+          </a:p>
+        </p:txBody>
       </p:sp>
       <p:sp>
         <p:nvSpPr>
@@ -8856,7 +9199,7 @@
           </a:bodyPr>
           <a:lstStyle/>
           <a:p>
-            <a:pPr algn="ctr" indent="0" marL="0">
+            <a:pPr marL="0" indent="0" algn="ctr">
               <a:buNone/>
             </a:pPr>
             <a:r>
@@ -8897,6 +9240,13 @@
             <a:prstDash val="solid"/>
           </a:ln>
         </p:spPr>
+        <p:txBody>
+          <a:bodyPr/>
+          <a:lstStyle/>
+          <a:p>
+            <a:endParaRPr lang="en-GB"/>
+          </a:p>
+        </p:txBody>
       </p:sp>
       <p:sp>
         <p:nvSpPr>
@@ -8921,7 +9271,7 @@
           </a:bodyPr>
           <a:lstStyle/>
           <a:p>
-            <a:pPr algn="ctr" indent="0" marL="0">
+            <a:pPr marL="0" indent="0" algn="ctr">
               <a:buNone/>
             </a:pPr>
             <a:r>
@@ -8962,6 +9312,13 @@
             <a:prstDash val="solid"/>
           </a:ln>
         </p:spPr>
+        <p:txBody>
+          <a:bodyPr/>
+          <a:lstStyle/>
+          <a:p>
+            <a:endParaRPr lang="en-GB"/>
+          </a:p>
+        </p:txBody>
       </p:sp>
       <p:sp>
         <p:nvSpPr>
@@ -8986,7 +9343,7 @@
           </a:bodyPr>
           <a:lstStyle/>
           <a:p>
-            <a:pPr algn="ctr" indent="0" marL="0">
+            <a:pPr marL="0" indent="0" algn="ctr">
               <a:buNone/>
             </a:pPr>
             <a:r>
@@ -9027,6 +9384,13 @@
             <a:prstDash val="solid"/>
           </a:ln>
         </p:spPr>
+        <p:txBody>
+          <a:bodyPr/>
+          <a:lstStyle/>
+          <a:p>
+            <a:endParaRPr lang="en-GB"/>
+          </a:p>
+        </p:txBody>
       </p:sp>
       <p:sp>
         <p:nvSpPr>
@@ -9051,7 +9415,7 @@
           </a:bodyPr>
           <a:lstStyle/>
           <a:p>
-            <a:pPr algn="ctr" indent="0" marL="0">
+            <a:pPr marL="0" indent="0" algn="ctr">
               <a:buNone/>
             </a:pPr>
             <a:r>
@@ -9092,6 +9456,13 @@
             <a:prstDash val="solid"/>
           </a:ln>
         </p:spPr>
+        <p:txBody>
+          <a:bodyPr/>
+          <a:lstStyle/>
+          <a:p>
+            <a:endParaRPr lang="en-GB"/>
+          </a:p>
+        </p:txBody>
       </p:sp>
       <p:sp>
         <p:nvSpPr>
@@ -9116,7 +9487,7 @@
           </a:bodyPr>
           <a:lstStyle/>
           <a:p>
-            <a:pPr algn="ctr" indent="0" marL="0">
+            <a:pPr marL="0" indent="0" algn="ctr">
               <a:buNone/>
             </a:pPr>
             <a:r>
@@ -9157,6 +9528,13 @@
             <a:prstDash val="solid"/>
           </a:ln>
         </p:spPr>
+        <p:txBody>
+          <a:bodyPr/>
+          <a:lstStyle/>
+          <a:p>
+            <a:endParaRPr lang="en-GB"/>
+          </a:p>
+        </p:txBody>
       </p:sp>
       <p:sp>
         <p:nvSpPr>
@@ -9181,7 +9559,7 @@
           </a:bodyPr>
           <a:lstStyle/>
           <a:p>
-            <a:pPr algn="ctr" indent="0" marL="0">
+            <a:pPr marL="0" indent="0" algn="ctr">
               <a:buNone/>
             </a:pPr>
             <a:r>
@@ -9222,6 +9600,13 @@
             <a:prstDash val="solid"/>
           </a:ln>
         </p:spPr>
+        <p:txBody>
+          <a:bodyPr/>
+          <a:lstStyle/>
+          <a:p>
+            <a:endParaRPr lang="en-GB"/>
+          </a:p>
+        </p:txBody>
       </p:sp>
       <p:sp>
         <p:nvSpPr>
@@ -9246,7 +9631,7 @@
           </a:bodyPr>
           <a:lstStyle/>
           <a:p>
-            <a:pPr algn="ctr" indent="0" marL="0">
+            <a:pPr marL="0" indent="0" algn="ctr">
               <a:buNone/>
             </a:pPr>
             <a:r>
@@ -9287,6 +9672,13 @@
             <a:prstDash val="solid"/>
           </a:ln>
         </p:spPr>
+        <p:txBody>
+          <a:bodyPr/>
+          <a:lstStyle/>
+          <a:p>
+            <a:endParaRPr lang="en-GB"/>
+          </a:p>
+        </p:txBody>
       </p:sp>
       <p:sp>
         <p:nvSpPr>
@@ -9311,7 +9703,7 @@
           </a:bodyPr>
           <a:lstStyle/>
           <a:p>
-            <a:pPr algn="l" indent="0" marL="0">
+            <a:pPr marL="0" indent="0" algn="l">
               <a:buNone/>
             </a:pPr>
             <a:r>
@@ -9352,6 +9744,13 @@
             <a:prstDash val="solid"/>
           </a:ln>
         </p:spPr>
+        <p:txBody>
+          <a:bodyPr/>
+          <a:lstStyle/>
+          <a:p>
+            <a:endParaRPr lang="en-GB"/>
+          </a:p>
+        </p:txBody>
       </p:sp>
       <p:sp>
         <p:nvSpPr>
@@ -9376,7 +9775,7 @@
           </a:bodyPr>
           <a:lstStyle/>
           <a:p>
-            <a:pPr algn="ctr" indent="0" marL="0">
+            <a:pPr marL="0" indent="0" algn="ctr">
               <a:buNone/>
             </a:pPr>
             <a:r>
@@ -9417,6 +9816,13 @@
             <a:prstDash val="solid"/>
           </a:ln>
         </p:spPr>
+        <p:txBody>
+          <a:bodyPr/>
+          <a:lstStyle/>
+          <a:p>
+            <a:endParaRPr lang="en-GB"/>
+          </a:p>
+        </p:txBody>
       </p:sp>
       <p:sp>
         <p:nvSpPr>
@@ -9441,7 +9847,7 @@
           </a:bodyPr>
           <a:lstStyle/>
           <a:p>
-            <a:pPr algn="ctr" indent="0" marL="0">
+            <a:pPr marL="0" indent="0" algn="ctr">
               <a:buNone/>
             </a:pPr>
             <a:r>
@@ -9482,6 +9888,13 @@
             <a:prstDash val="solid"/>
           </a:ln>
         </p:spPr>
+        <p:txBody>
+          <a:bodyPr/>
+          <a:lstStyle/>
+          <a:p>
+            <a:endParaRPr lang="en-GB"/>
+          </a:p>
+        </p:txBody>
       </p:sp>
       <p:sp>
         <p:nvSpPr>
@@ -9506,7 +9919,7 @@
           </a:bodyPr>
           <a:lstStyle/>
           <a:p>
-            <a:pPr algn="ctr" indent="0" marL="0">
+            <a:pPr marL="0" indent="0" algn="ctr">
               <a:buNone/>
             </a:pPr>
             <a:r>
@@ -9547,6 +9960,13 @@
             <a:prstDash val="solid"/>
           </a:ln>
         </p:spPr>
+        <p:txBody>
+          <a:bodyPr/>
+          <a:lstStyle/>
+          <a:p>
+            <a:endParaRPr lang="en-GB"/>
+          </a:p>
+        </p:txBody>
       </p:sp>
       <p:sp>
         <p:nvSpPr>
@@ -9571,7 +9991,7 @@
           </a:bodyPr>
           <a:lstStyle/>
           <a:p>
-            <a:pPr algn="ctr" indent="0" marL="0">
+            <a:pPr marL="0" indent="0" algn="ctr">
               <a:buNone/>
             </a:pPr>
             <a:r>
@@ -9612,6 +10032,13 @@
             <a:prstDash val="solid"/>
           </a:ln>
         </p:spPr>
+        <p:txBody>
+          <a:bodyPr/>
+          <a:lstStyle/>
+          <a:p>
+            <a:endParaRPr lang="en-GB"/>
+          </a:p>
+        </p:txBody>
       </p:sp>
       <p:sp>
         <p:nvSpPr>
@@ -9636,7 +10063,7 @@
           </a:bodyPr>
           <a:lstStyle/>
           <a:p>
-            <a:pPr algn="ctr" indent="0" marL="0">
+            <a:pPr marL="0" indent="0" algn="ctr">
               <a:buNone/>
             </a:pPr>
             <a:r>
@@ -9677,6 +10104,13 @@
             <a:prstDash val="solid"/>
           </a:ln>
         </p:spPr>
+        <p:txBody>
+          <a:bodyPr/>
+          <a:lstStyle/>
+          <a:p>
+            <a:endParaRPr lang="en-GB"/>
+          </a:p>
+        </p:txBody>
       </p:sp>
       <p:sp>
         <p:nvSpPr>
@@ -9701,7 +10135,7 @@
           </a:bodyPr>
           <a:lstStyle/>
           <a:p>
-            <a:pPr algn="ctr" indent="0" marL="0">
+            <a:pPr marL="0" indent="0" algn="ctr">
               <a:buNone/>
             </a:pPr>
             <a:r>
@@ -9742,6 +10176,13 @@
             <a:prstDash val="solid"/>
           </a:ln>
         </p:spPr>
+        <p:txBody>
+          <a:bodyPr/>
+          <a:lstStyle/>
+          <a:p>
+            <a:endParaRPr lang="en-GB"/>
+          </a:p>
+        </p:txBody>
       </p:sp>
       <p:sp>
         <p:nvSpPr>
@@ -9766,7 +10207,7 @@
           </a:bodyPr>
           <a:lstStyle/>
           <a:p>
-            <a:pPr algn="ctr" indent="0" marL="0">
+            <a:pPr marL="0" indent="0" algn="ctr">
               <a:buNone/>
             </a:pPr>
             <a:r>
@@ -9809,6 +10250,13 @@
             <a:prstDash val="solid"/>
           </a:ln>
         </p:spPr>
+        <p:txBody>
+          <a:bodyPr/>
+          <a:lstStyle/>
+          <a:p>
+            <a:endParaRPr lang="en-GB"/>
+          </a:p>
+        </p:txBody>
       </p:sp>
       <p:sp>
         <p:nvSpPr>
@@ -9831,7 +10279,7 @@
           <a:bodyPr wrap="square" lIns="0" tIns="0" rIns="0" bIns="0" rtlCol="0" anchor="ctr"/>
           <a:lstStyle/>
           <a:p>
-            <a:pPr indent="0" marL="0">
+            <a:pPr marL="0" indent="0">
               <a:buNone/>
             </a:pPr>
             <a:r>
@@ -9848,14 +10296,14 @@
       </p:sp>
       <p:pic>
         <p:nvPicPr>
-          <p:cNvPr id="73" name="Image 0" descr="/mnt/data/key_extracted_plots/11_roc_curve_validation.png">    </p:cNvPr>
+          <p:cNvPr id="73" name="Image 0" descr="/mnt/data/key_extracted_plots/11_roc_curve_validation.png"/>
           <p:cNvPicPr>
             <a:picLocks noChangeAspect="1"/>
           </p:cNvPicPr>
           <p:nvPr/>
         </p:nvPicPr>
         <p:blipFill>
-          <a:blip r:embed="rId1"/>
+          <a:blip r:embed="rId3"/>
           <a:stretch>
             <a:fillRect/>
           </a:stretch>
@@ -9898,6 +10346,13 @@
             <a:prstDash val="solid"/>
           </a:ln>
         </p:spPr>
+        <p:txBody>
+          <a:bodyPr/>
+          <a:lstStyle/>
+          <a:p>
+            <a:endParaRPr lang="en-GB"/>
+          </a:p>
+        </p:txBody>
       </p:sp>
       <p:sp>
         <p:nvSpPr>
@@ -9920,7 +10375,7 @@
           <a:bodyPr wrap="square" lIns="0" tIns="0" rIns="0" bIns="0" rtlCol="0" anchor="ctr"/>
           <a:lstStyle/>
           <a:p>
-            <a:pPr indent="0" marL="0">
+            <a:pPr marL="0" indent="0">
               <a:buNone/>
             </a:pPr>
             <a:r>
@@ -9937,14 +10392,14 @@
       </p:sp>
       <p:pic>
         <p:nvPicPr>
-          <p:cNvPr id="76" name="Image 1" descr="/mnt/data/key_extracted_plots/12_precision_recall_curve_validation.png">    </p:cNvPr>
+          <p:cNvPr id="76" name="Image 1" descr="/mnt/data/key_extracted_plots/12_precision_recall_curve_validation.png"/>
           <p:cNvPicPr>
             <a:picLocks noChangeAspect="1"/>
           </p:cNvPicPr>
           <p:nvPr/>
         </p:nvPicPr>
         <p:blipFill>
-          <a:blip r:embed="rId2"/>
+          <a:blip r:embed="rId4"/>
           <a:stretch>
             <a:fillRect/>
           </a:stretch>
@@ -9980,7 +10435,7 @@
           <a:bodyPr wrap="square" lIns="0" tIns="0" rIns="0" bIns="0" rtlCol="0" anchor="ctr"/>
           <a:lstStyle/>
           <a:p>
-            <a:pPr algn="ctr" indent="0" marL="0">
+            <a:pPr marL="0" indent="0" algn="ctr">
               <a:buNone/>
             </a:pPr>
             <a:r>
@@ -10011,6 +10466,7 @@
         <a:solidFill>
           <a:srgbClr val="FFFFFF"/>
         </a:solidFill>
+        <a:effectLst/>
       </p:bgPr>
     </p:bg>
     <p:spTree>
@@ -10051,6 +10507,13 @@
             <a:prstDash val="solid"/>
           </a:ln>
         </p:spPr>
+        <p:txBody>
+          <a:bodyPr/>
+          <a:lstStyle/>
+          <a:p>
+            <a:endParaRPr lang="en-GB"/>
+          </a:p>
+        </p:txBody>
       </p:sp>
       <p:sp>
         <p:nvSpPr>
@@ -10073,7 +10536,7 @@
           <a:bodyPr wrap="square" lIns="0" tIns="0" rIns="0" bIns="0" rtlCol="0" anchor="ctr"/>
           <a:lstStyle/>
           <a:p>
-            <a:pPr indent="0" marL="0">
+            <a:pPr marL="0" indent="0">
               <a:buNone/>
             </a:pPr>
             <a:r>
@@ -10112,7 +10575,7 @@
           <a:bodyPr wrap="square" lIns="0" tIns="0" rIns="0" bIns="0" rtlCol="0" anchor="ctr"/>
           <a:lstStyle/>
           <a:p>
-            <a:pPr indent="0" marL="0">
+            <a:pPr marL="0" indent="0">
               <a:buNone/>
             </a:pPr>
             <a:r>
@@ -10148,7 +10611,7 @@
           <a:bodyPr wrap="square" lIns="0" tIns="0" rIns="0" bIns="0" rtlCol="0" anchor="ctr"/>
           <a:lstStyle/>
           <a:p>
-            <a:pPr indent="0" marL="0">
+            <a:pPr marL="0" indent="0">
               <a:buNone/>
             </a:pPr>
             <a:r>
@@ -10184,7 +10647,7 @@
           <a:bodyPr wrap="square" lIns="0" tIns="0" rIns="0" bIns="0" rtlCol="0" anchor="ctr"/>
           <a:lstStyle/>
           <a:p>
-            <a:pPr algn="r" indent="0" marL="0">
+            <a:pPr marL="0" indent="0" algn="r">
               <a:buNone/>
             </a:pPr>
             <a:r>
@@ -10227,6 +10690,13 @@
             <a:prstDash val="solid"/>
           </a:ln>
         </p:spPr>
+        <p:txBody>
+          <a:bodyPr/>
+          <a:lstStyle/>
+          <a:p>
+            <a:endParaRPr lang="en-GB"/>
+          </a:p>
+        </p:txBody>
       </p:sp>
       <p:sp>
         <p:nvSpPr>
@@ -10252,6 +10722,13 @@
             <a:prstDash val="solid"/>
           </a:ln>
         </p:spPr>
+        <p:txBody>
+          <a:bodyPr/>
+          <a:lstStyle/>
+          <a:p>
+            <a:endParaRPr lang="en-GB"/>
+          </a:p>
+        </p:txBody>
       </p:sp>
       <p:sp>
         <p:nvSpPr>
@@ -10274,7 +10751,7 @@
           <a:bodyPr wrap="square" lIns="0" tIns="0" rIns="0" bIns="0" rtlCol="0" anchor="ctr"/>
           <a:lstStyle/>
           <a:p>
-            <a:pPr algn="ctr" indent="0" marL="0">
+            <a:pPr marL="0" indent="0" algn="ctr">
               <a:buNone/>
             </a:pPr>
             <a:r>
@@ -10310,7 +10787,7 @@
           <a:bodyPr wrap="square" lIns="0" tIns="0" rIns="0" bIns="0" rtlCol="0" anchor="ctr"/>
           <a:lstStyle/>
           <a:p>
-            <a:pPr algn="ctr" indent="0" marL="0">
+            <a:pPr marL="0" indent="0" algn="ctr">
               <a:buNone/>
             </a:pPr>
             <a:r>
@@ -10353,6 +10830,13 @@
             <a:prstDash val="solid"/>
           </a:ln>
         </p:spPr>
+        <p:txBody>
+          <a:bodyPr/>
+          <a:lstStyle/>
+          <a:p>
+            <a:endParaRPr lang="en-GB"/>
+          </a:p>
+        </p:txBody>
       </p:sp>
       <p:sp>
         <p:nvSpPr>
@@ -10378,6 +10862,13 @@
             <a:prstDash val="solid"/>
           </a:ln>
         </p:spPr>
+        <p:txBody>
+          <a:bodyPr/>
+          <a:lstStyle/>
+          <a:p>
+            <a:endParaRPr lang="en-GB"/>
+          </a:p>
+        </p:txBody>
       </p:sp>
       <p:sp>
         <p:nvSpPr>
@@ -10400,7 +10891,7 @@
           <a:bodyPr wrap="square" lIns="0" tIns="0" rIns="0" bIns="0" rtlCol="0" anchor="ctr"/>
           <a:lstStyle/>
           <a:p>
-            <a:pPr algn="ctr" indent="0" marL="0">
+            <a:pPr marL="0" indent="0" algn="ctr">
               <a:buNone/>
             </a:pPr>
             <a:r>
@@ -10436,7 +10927,7 @@
           <a:bodyPr wrap="square" lIns="0" tIns="0" rIns="0" bIns="0" rtlCol="0" anchor="ctr"/>
           <a:lstStyle/>
           <a:p>
-            <a:pPr algn="ctr" indent="0" marL="0">
+            <a:pPr marL="0" indent="0" algn="ctr">
               <a:buNone/>
             </a:pPr>
             <a:r>
@@ -10479,6 +10970,13 @@
             <a:prstDash val="solid"/>
           </a:ln>
         </p:spPr>
+        <p:txBody>
+          <a:bodyPr/>
+          <a:lstStyle/>
+          <a:p>
+            <a:endParaRPr lang="en-GB"/>
+          </a:p>
+        </p:txBody>
       </p:sp>
       <p:sp>
         <p:nvSpPr>
@@ -10504,6 +11002,13 @@
             <a:prstDash val="solid"/>
           </a:ln>
         </p:spPr>
+        <p:txBody>
+          <a:bodyPr/>
+          <a:lstStyle/>
+          <a:p>
+            <a:endParaRPr lang="en-GB"/>
+          </a:p>
+        </p:txBody>
       </p:sp>
       <p:sp>
         <p:nvSpPr>
@@ -10526,7 +11031,7 @@
           <a:bodyPr wrap="square" lIns="0" tIns="0" rIns="0" bIns="0" rtlCol="0" anchor="ctr"/>
           <a:lstStyle/>
           <a:p>
-            <a:pPr algn="ctr" indent="0" marL="0">
+            <a:pPr marL="0" indent="0" algn="ctr">
               <a:buNone/>
             </a:pPr>
             <a:r>
@@ -10562,7 +11067,7 @@
           <a:bodyPr wrap="square" lIns="0" tIns="0" rIns="0" bIns="0" rtlCol="0" anchor="ctr"/>
           <a:lstStyle/>
           <a:p>
-            <a:pPr algn="ctr" indent="0" marL="0">
+            <a:pPr marL="0" indent="0" algn="ctr">
               <a:buNone/>
             </a:pPr>
             <a:r>
@@ -10605,6 +11110,13 @@
             <a:prstDash val="solid"/>
           </a:ln>
         </p:spPr>
+        <p:txBody>
+          <a:bodyPr/>
+          <a:lstStyle/>
+          <a:p>
+            <a:endParaRPr lang="en-GB"/>
+          </a:p>
+        </p:txBody>
       </p:sp>
       <p:sp>
         <p:nvSpPr>
@@ -10630,6 +11142,13 @@
             <a:prstDash val="solid"/>
           </a:ln>
         </p:spPr>
+        <p:txBody>
+          <a:bodyPr/>
+          <a:lstStyle/>
+          <a:p>
+            <a:endParaRPr lang="en-GB"/>
+          </a:p>
+        </p:txBody>
       </p:sp>
       <p:sp>
         <p:nvSpPr>
@@ -10652,7 +11171,7 @@
           <a:bodyPr wrap="square" lIns="0" tIns="0" rIns="0" bIns="0" rtlCol="0" anchor="ctr"/>
           <a:lstStyle/>
           <a:p>
-            <a:pPr algn="ctr" indent="0" marL="0">
+            <a:pPr marL="0" indent="0" algn="ctr">
               <a:buNone/>
             </a:pPr>
             <a:r>
@@ -10688,7 +11207,7 @@
           <a:bodyPr wrap="square" lIns="0" tIns="0" rIns="0" bIns="0" rtlCol="0" anchor="ctr"/>
           <a:lstStyle/>
           <a:p>
-            <a:pPr algn="ctr" indent="0" marL="0">
+            <a:pPr marL="0" indent="0" algn="ctr">
               <a:buNone/>
             </a:pPr>
             <a:r>
@@ -10731,6 +11250,13 @@
             <a:prstDash val="solid"/>
           </a:ln>
         </p:spPr>
+        <p:txBody>
+          <a:bodyPr/>
+          <a:lstStyle/>
+          <a:p>
+            <a:endParaRPr lang="en-GB"/>
+          </a:p>
+        </p:txBody>
       </p:sp>
       <p:sp>
         <p:nvSpPr>
@@ -10756,6 +11282,13 @@
             <a:prstDash val="solid"/>
           </a:ln>
         </p:spPr>
+        <p:txBody>
+          <a:bodyPr/>
+          <a:lstStyle/>
+          <a:p>
+            <a:endParaRPr lang="en-GB"/>
+          </a:p>
+        </p:txBody>
       </p:sp>
       <p:sp>
         <p:nvSpPr>
@@ -10778,7 +11311,7 @@
           <a:bodyPr wrap="square" lIns="0" tIns="0" rIns="0" bIns="0" rtlCol="0" anchor="ctr"/>
           <a:lstStyle/>
           <a:p>
-            <a:pPr algn="ctr" indent="0" marL="0">
+            <a:pPr marL="0" indent="0" algn="ctr">
               <a:buNone/>
             </a:pPr>
             <a:r>
@@ -10814,7 +11347,7 @@
           <a:bodyPr wrap="square" lIns="0" tIns="0" rIns="0" bIns="0" rtlCol="0" anchor="ctr"/>
           <a:lstStyle/>
           <a:p>
-            <a:pPr algn="ctr" indent="0" marL="0">
+            <a:pPr marL="0" indent="0" algn="ctr">
               <a:buNone/>
             </a:pPr>
             <a:r>
@@ -10857,6 +11390,13 @@
             <a:prstDash val="solid"/>
           </a:ln>
         </p:spPr>
+        <p:txBody>
+          <a:bodyPr/>
+          <a:lstStyle/>
+          <a:p>
+            <a:endParaRPr lang="en-GB"/>
+          </a:p>
+        </p:txBody>
       </p:sp>
       <p:sp>
         <p:nvSpPr>
@@ -10882,6 +11422,13 @@
             <a:prstDash val="solid"/>
           </a:ln>
         </p:spPr>
+        <p:txBody>
+          <a:bodyPr/>
+          <a:lstStyle/>
+          <a:p>
+            <a:endParaRPr lang="en-GB"/>
+          </a:p>
+        </p:txBody>
       </p:sp>
       <p:sp>
         <p:nvSpPr>
@@ -10904,7 +11451,7 @@
           <a:bodyPr wrap="square" lIns="0" tIns="0" rIns="0" bIns="0" rtlCol="0" anchor="ctr"/>
           <a:lstStyle/>
           <a:p>
-            <a:pPr algn="ctr" indent="0" marL="0">
+            <a:pPr marL="0" indent="0" algn="ctr">
               <a:buNone/>
             </a:pPr>
             <a:r>
@@ -10940,7 +11487,7 @@
           <a:bodyPr wrap="square" lIns="0" tIns="0" rIns="0" bIns="0" rtlCol="0" anchor="ctr"/>
           <a:lstStyle/>
           <a:p>
-            <a:pPr algn="ctr" indent="0" marL="0">
+            <a:pPr marL="0" indent="0" algn="ctr">
               <a:buNone/>
             </a:pPr>
             <a:r>
@@ -10983,6 +11530,13 @@
             <a:prstDash val="solid"/>
           </a:ln>
         </p:spPr>
+        <p:txBody>
+          <a:bodyPr/>
+          <a:lstStyle/>
+          <a:p>
+            <a:endParaRPr lang="en-GB"/>
+          </a:p>
+        </p:txBody>
       </p:sp>
       <p:sp>
         <p:nvSpPr>
@@ -11005,7 +11559,7 @@
           <a:bodyPr wrap="square" lIns="0" tIns="0" rIns="0" bIns="0" rtlCol="0" anchor="ctr"/>
           <a:lstStyle/>
           <a:p>
-            <a:pPr indent="0" marL="0">
+            <a:pPr marL="0" indent="0">
               <a:buNone/>
             </a:pPr>
             <a:r>
@@ -11022,14 +11576,14 @@
       </p:sp>
       <p:pic>
         <p:nvPicPr>
-          <p:cNvPr id="33" name="Image 0" descr="/mnt/data/key_extracted_plots/14_test_confusion_matrix.png">    </p:cNvPr>
+          <p:cNvPr id="33" name="Image 0" descr="/mnt/data/key_extracted_plots/14_test_confusion_matrix.png"/>
           <p:cNvPicPr>
             <a:picLocks noChangeAspect="1"/>
           </p:cNvPicPr>
           <p:nvPr/>
         </p:nvPicPr>
         <p:blipFill>
-          <a:blip r:embed="rId1"/>
+          <a:blip r:embed="rId3"/>
           <a:stretch>
             <a:fillRect/>
           </a:stretch>
@@ -11072,6 +11626,13 @@
             <a:prstDash val="solid"/>
           </a:ln>
         </p:spPr>
+        <p:txBody>
+          <a:bodyPr/>
+          <a:lstStyle/>
+          <a:p>
+            <a:endParaRPr lang="en-GB"/>
+          </a:p>
+        </p:txBody>
       </p:sp>
       <p:sp>
         <p:nvSpPr>
@@ -11094,7 +11655,7 @@
           <a:bodyPr wrap="square" lIns="0" tIns="0" rIns="0" bIns="0" rtlCol="0" anchor="ctr"/>
           <a:lstStyle/>
           <a:p>
-            <a:pPr indent="0" marL="0">
+            <a:pPr marL="0" indent="0">
               <a:buNone/>
             </a:pPr>
             <a:r>
@@ -11132,7 +11693,7 @@
           </a:bodyPr>
           <a:lstStyle/>
           <a:p>
-            <a:pPr indent="0" marL="0">
+            <a:pPr marL="0" indent="0">
               <a:buNone/>
             </a:pPr>
             <a:r>
@@ -11146,7 +11707,7 @@
             <a:endParaRPr lang="en-US" sz="1220" dirty="0"/>
           </a:p>
           <a:p>
-            <a:pPr indent="0" marL="0">
+            <a:pPr marL="0" indent="0">
               <a:buNone/>
             </a:pPr>
             <a:r>
@@ -11160,7 +11721,7 @@
             <a:endParaRPr lang="en-US" sz="1220" dirty="0"/>
           </a:p>
           <a:p>
-            <a:pPr indent="0" marL="0">
+            <a:pPr marL="0" indent="0">
               <a:buNone/>
             </a:pPr>
             <a:r>
@@ -11174,7 +11735,7 @@
             <a:endParaRPr lang="en-US" sz="1220" dirty="0"/>
           </a:p>
           <a:p>
-            <a:pPr indent="0" marL="0">
+            <a:pPr marL="0" indent="0">
               <a:buNone/>
             </a:pPr>
             <a:r>
@@ -11210,7 +11771,7 @@
           <a:bodyPr wrap="square" lIns="0" tIns="0" rIns="0" bIns="0" rtlCol="0" anchor="ctr"/>
           <a:lstStyle/>
           <a:p>
-            <a:pPr algn="ctr" indent="0" marL="0">
+            <a:pPr marL="0" indent="0" algn="ctr">
               <a:buNone/>
             </a:pPr>
             <a:r>
@@ -11241,6 +11802,7 @@
         <a:solidFill>
           <a:srgbClr val="FFFFFF"/>
         </a:solidFill>
+        <a:effectLst/>
       </p:bgPr>
     </p:bg>
     <p:spTree>
@@ -11281,6 +11843,13 @@
             <a:prstDash val="solid"/>
           </a:ln>
         </p:spPr>
+        <p:txBody>
+          <a:bodyPr/>
+          <a:lstStyle/>
+          <a:p>
+            <a:endParaRPr lang="en-GB"/>
+          </a:p>
+        </p:txBody>
       </p:sp>
       <p:sp>
         <p:nvSpPr>
@@ -11303,7 +11872,7 @@
           <a:bodyPr wrap="square" lIns="0" tIns="0" rIns="0" bIns="0" rtlCol="0" anchor="ctr"/>
           <a:lstStyle/>
           <a:p>
-            <a:pPr indent="0" marL="0">
+            <a:pPr marL="0" indent="0">
               <a:buNone/>
             </a:pPr>
             <a:r>
@@ -11342,7 +11911,7 @@
           <a:bodyPr wrap="square" lIns="0" tIns="0" rIns="0" bIns="0" rtlCol="0" anchor="ctr"/>
           <a:lstStyle/>
           <a:p>
-            <a:pPr indent="0" marL="0">
+            <a:pPr marL="0" indent="0">
               <a:buNone/>
             </a:pPr>
             <a:r>
@@ -11378,7 +11947,7 @@
           <a:bodyPr wrap="square" lIns="0" tIns="0" rIns="0" bIns="0" rtlCol="0" anchor="ctr"/>
           <a:lstStyle/>
           <a:p>
-            <a:pPr indent="0" marL="0">
+            <a:pPr marL="0" indent="0">
               <a:buNone/>
             </a:pPr>
             <a:r>
@@ -11414,7 +11983,7 @@
           <a:bodyPr wrap="square" lIns="0" tIns="0" rIns="0" bIns="0" rtlCol="0" anchor="ctr"/>
           <a:lstStyle/>
           <a:p>
-            <a:pPr algn="r" indent="0" marL="0">
+            <a:pPr marL="0" indent="0" algn="r">
               <a:buNone/>
             </a:pPr>
             <a:r>
@@ -11457,6 +12026,13 @@
             <a:prstDash val="solid"/>
           </a:ln>
         </p:spPr>
+        <p:txBody>
+          <a:bodyPr/>
+          <a:lstStyle/>
+          <a:p>
+            <a:endParaRPr lang="en-GB"/>
+          </a:p>
+        </p:txBody>
       </p:sp>
       <p:sp>
         <p:nvSpPr>
@@ -11479,7 +12055,7 @@
           <a:bodyPr wrap="square" lIns="0" tIns="0" rIns="0" bIns="0" rtlCol="0" anchor="ctr"/>
           <a:lstStyle/>
           <a:p>
-            <a:pPr indent="0" marL="0">
+            <a:pPr marL="0" indent="0">
               <a:buNone/>
             </a:pPr>
             <a:r>
@@ -11496,14 +12072,14 @@
       </p:sp>
       <p:pic>
         <p:nvPicPr>
-          <p:cNvPr id="9" name="Image 0" descr="/mnt/data/key_extracted_plots/13_threshold_analysis.png">    </p:cNvPr>
+          <p:cNvPr id="9" name="Image 0" descr="/mnt/data/key_extracted_plots/13_threshold_analysis.png"/>
           <p:cNvPicPr>
             <a:picLocks noChangeAspect="1"/>
           </p:cNvPicPr>
           <p:nvPr/>
         </p:nvPicPr>
         <p:blipFill>
-          <a:blip r:embed="rId1"/>
+          <a:blip r:embed="rId3"/>
           <a:stretch>
             <a:fillRect/>
           </a:stretch>
@@ -11546,6 +12122,13 @@
             <a:prstDash val="solid"/>
           </a:ln>
         </p:spPr>
+        <p:txBody>
+          <a:bodyPr/>
+          <a:lstStyle/>
+          <a:p>
+            <a:endParaRPr lang="en-GB"/>
+          </a:p>
+        </p:txBody>
       </p:sp>
       <p:sp>
         <p:nvSpPr>
@@ -11568,7 +12151,7 @@
           <a:bodyPr wrap="square" lIns="0" tIns="0" rIns="0" bIns="0" rtlCol="0" anchor="ctr"/>
           <a:lstStyle/>
           <a:p>
-            <a:pPr indent="0" marL="0">
+            <a:pPr marL="0" indent="0">
               <a:buNone/>
             </a:pPr>
             <a:r>
@@ -11607,6 +12190,13 @@
             <a:prstDash val="solid"/>
           </a:ln>
         </p:spPr>
+        <p:txBody>
+          <a:bodyPr/>
+          <a:lstStyle/>
+          <a:p>
+            <a:endParaRPr lang="en-GB"/>
+          </a:p>
+        </p:txBody>
       </p:sp>
       <p:sp>
         <p:nvSpPr>
@@ -11629,7 +12219,7 @@
           <a:bodyPr wrap="square" lIns="0" tIns="0" rIns="0" bIns="0" rtlCol="0" anchor="ctr"/>
           <a:lstStyle/>
           <a:p>
-            <a:pPr algn="ctr" indent="0" marL="0">
+            <a:pPr marL="0" indent="0" algn="ctr">
               <a:buNone/>
             </a:pPr>
             <a:r>
@@ -11668,6 +12258,13 @@
             <a:prstDash val="solid"/>
           </a:ln>
         </p:spPr>
+        <p:txBody>
+          <a:bodyPr/>
+          <a:lstStyle/>
+          <a:p>
+            <a:endParaRPr lang="en-GB"/>
+          </a:p>
+        </p:txBody>
       </p:sp>
       <p:sp>
         <p:nvSpPr>
@@ -11690,7 +12287,7 @@
           <a:bodyPr wrap="square" lIns="0" tIns="0" rIns="0" bIns="0" rtlCol="0" anchor="ctr"/>
           <a:lstStyle/>
           <a:p>
-            <a:pPr algn="ctr" indent="0" marL="0">
+            <a:pPr marL="0" indent="0" algn="ctr">
               <a:buNone/>
             </a:pPr>
             <a:r>
@@ -11729,6 +12326,13 @@
             <a:prstDash val="solid"/>
           </a:ln>
         </p:spPr>
+        <p:txBody>
+          <a:bodyPr/>
+          <a:lstStyle/>
+          <a:p>
+            <a:endParaRPr lang="en-GB"/>
+          </a:p>
+        </p:txBody>
       </p:sp>
       <p:sp>
         <p:nvSpPr>
@@ -11751,7 +12355,7 @@
           <a:bodyPr wrap="square" lIns="0" tIns="0" rIns="0" bIns="0" rtlCol="0" anchor="ctr"/>
           <a:lstStyle/>
           <a:p>
-            <a:pPr algn="ctr" indent="0" marL="0">
+            <a:pPr marL="0" indent="0" algn="ctr">
               <a:buNone/>
             </a:pPr>
             <a:r>
@@ -11790,6 +12394,13 @@
             <a:prstDash val="solid"/>
           </a:ln>
         </p:spPr>
+        <p:txBody>
+          <a:bodyPr/>
+          <a:lstStyle/>
+          <a:p>
+            <a:endParaRPr lang="en-GB"/>
+          </a:p>
+        </p:txBody>
       </p:sp>
       <p:sp>
         <p:nvSpPr>
@@ -11812,7 +12423,7 @@
           <a:bodyPr wrap="square" lIns="0" tIns="0" rIns="0" bIns="0" rtlCol="0" anchor="ctr"/>
           <a:lstStyle/>
           <a:p>
-            <a:pPr algn="ctr" indent="0" marL="0">
+            <a:pPr marL="0" indent="0" algn="ctr">
               <a:buNone/>
             </a:pPr>
             <a:r>
@@ -11853,6 +12464,13 @@
             <a:prstDash val="solid"/>
           </a:ln>
         </p:spPr>
+        <p:txBody>
+          <a:bodyPr/>
+          <a:lstStyle/>
+          <a:p>
+            <a:endParaRPr lang="en-GB"/>
+          </a:p>
+        </p:txBody>
       </p:sp>
       <p:sp>
         <p:nvSpPr>
@@ -11877,7 +12495,7 @@
           </a:bodyPr>
           <a:lstStyle/>
           <a:p>
-            <a:pPr algn="l" indent="0" marL="0">
+            <a:pPr marL="0" indent="0" algn="l">
               <a:buNone/>
             </a:pPr>
             <a:r>
@@ -11918,6 +12536,13 @@
             <a:prstDash val="solid"/>
           </a:ln>
         </p:spPr>
+        <p:txBody>
+          <a:bodyPr/>
+          <a:lstStyle/>
+          <a:p>
+            <a:endParaRPr lang="en-GB"/>
+          </a:p>
+        </p:txBody>
       </p:sp>
       <p:sp>
         <p:nvSpPr>
@@ -11942,7 +12567,7 @@
           </a:bodyPr>
           <a:lstStyle/>
           <a:p>
-            <a:pPr algn="ctr" indent="0" marL="0">
+            <a:pPr marL="0" indent="0" algn="ctr">
               <a:buNone/>
             </a:pPr>
             <a:r>
@@ -11983,6 +12608,13 @@
             <a:prstDash val="solid"/>
           </a:ln>
         </p:spPr>
+        <p:txBody>
+          <a:bodyPr/>
+          <a:lstStyle/>
+          <a:p>
+            <a:endParaRPr lang="en-GB"/>
+          </a:p>
+        </p:txBody>
       </p:sp>
       <p:sp>
         <p:nvSpPr>
@@ -12007,7 +12639,7 @@
           </a:bodyPr>
           <a:lstStyle/>
           <a:p>
-            <a:pPr algn="ctr" indent="0" marL="0">
+            <a:pPr marL="0" indent="0" algn="ctr">
               <a:buNone/>
             </a:pPr>
             <a:r>
@@ -12048,6 +12680,13 @@
             <a:prstDash val="solid"/>
           </a:ln>
         </p:spPr>
+        <p:txBody>
+          <a:bodyPr/>
+          <a:lstStyle/>
+          <a:p>
+            <a:endParaRPr lang="en-GB"/>
+          </a:p>
+        </p:txBody>
       </p:sp>
       <p:sp>
         <p:nvSpPr>
@@ -12072,7 +12711,7 @@
           </a:bodyPr>
           <a:lstStyle/>
           <a:p>
-            <a:pPr algn="ctr" indent="0" marL="0">
+            <a:pPr marL="0" indent="0" algn="ctr">
               <a:buNone/>
             </a:pPr>
             <a:r>
@@ -12113,6 +12752,13 @@
             <a:prstDash val="solid"/>
           </a:ln>
         </p:spPr>
+        <p:txBody>
+          <a:bodyPr/>
+          <a:lstStyle/>
+          <a:p>
+            <a:endParaRPr lang="en-GB"/>
+          </a:p>
+        </p:txBody>
       </p:sp>
       <p:sp>
         <p:nvSpPr>
@@ -12137,7 +12783,7 @@
           </a:bodyPr>
           <a:lstStyle/>
           <a:p>
-            <a:pPr algn="l" indent="0" marL="0">
+            <a:pPr marL="0" indent="0" algn="l">
               <a:buNone/>
             </a:pPr>
             <a:r>
@@ -12178,6 +12824,13 @@
             <a:prstDash val="solid"/>
           </a:ln>
         </p:spPr>
+        <p:txBody>
+          <a:bodyPr/>
+          <a:lstStyle/>
+          <a:p>
+            <a:endParaRPr lang="en-GB"/>
+          </a:p>
+        </p:txBody>
       </p:sp>
       <p:sp>
         <p:nvSpPr>
@@ -12202,7 +12855,7 @@
           </a:bodyPr>
           <a:lstStyle/>
           <a:p>
-            <a:pPr algn="ctr" indent="0" marL="0">
+            <a:pPr marL="0" indent="0" algn="ctr">
               <a:buNone/>
             </a:pPr>
             <a:r>
@@ -12243,6 +12896,13 @@
             <a:prstDash val="solid"/>
           </a:ln>
         </p:spPr>
+        <p:txBody>
+          <a:bodyPr/>
+          <a:lstStyle/>
+          <a:p>
+            <a:endParaRPr lang="en-GB"/>
+          </a:p>
+        </p:txBody>
       </p:sp>
       <p:sp>
         <p:nvSpPr>
@@ -12267,7 +12927,7 @@
           </a:bodyPr>
           <a:lstStyle/>
           <a:p>
-            <a:pPr algn="ctr" indent="0" marL="0">
+            <a:pPr marL="0" indent="0" algn="ctr">
               <a:buNone/>
             </a:pPr>
             <a:r>
@@ -12308,6 +12968,13 @@
             <a:prstDash val="solid"/>
           </a:ln>
         </p:spPr>
+        <p:txBody>
+          <a:bodyPr/>
+          <a:lstStyle/>
+          <a:p>
+            <a:endParaRPr lang="en-GB"/>
+          </a:p>
+        </p:txBody>
       </p:sp>
       <p:sp>
         <p:nvSpPr>
@@ -12332,7 +12999,7 @@
           </a:bodyPr>
           <a:lstStyle/>
           <a:p>
-            <a:pPr algn="ctr" indent="0" marL="0">
+            <a:pPr marL="0" indent="0" algn="ctr">
               <a:buNone/>
             </a:pPr>
             <a:r>
@@ -12373,6 +13040,13 @@
             <a:prstDash val="solid"/>
           </a:ln>
         </p:spPr>
+        <p:txBody>
+          <a:bodyPr/>
+          <a:lstStyle/>
+          <a:p>
+            <a:endParaRPr lang="en-GB"/>
+          </a:p>
+        </p:txBody>
       </p:sp>
       <p:sp>
         <p:nvSpPr>
@@ -12397,7 +13071,7 @@
           </a:bodyPr>
           <a:lstStyle/>
           <a:p>
-            <a:pPr algn="l" indent="0" marL="0">
+            <a:pPr marL="0" indent="0" algn="l">
               <a:buNone/>
             </a:pPr>
             <a:r>
@@ -12438,6 +13112,13 @@
             <a:prstDash val="solid"/>
           </a:ln>
         </p:spPr>
+        <p:txBody>
+          <a:bodyPr/>
+          <a:lstStyle/>
+          <a:p>
+            <a:endParaRPr lang="en-GB"/>
+          </a:p>
+        </p:txBody>
       </p:sp>
       <p:sp>
         <p:nvSpPr>
@@ -12462,7 +13143,7 @@
           </a:bodyPr>
           <a:lstStyle/>
           <a:p>
-            <a:pPr algn="ctr" indent="0" marL="0">
+            <a:pPr marL="0" indent="0" algn="ctr">
               <a:buNone/>
             </a:pPr>
             <a:r>
@@ -12503,6 +13184,13 @@
             <a:prstDash val="solid"/>
           </a:ln>
         </p:spPr>
+        <p:txBody>
+          <a:bodyPr/>
+          <a:lstStyle/>
+          <a:p>
+            <a:endParaRPr lang="en-GB"/>
+          </a:p>
+        </p:txBody>
       </p:sp>
       <p:sp>
         <p:nvSpPr>
@@ -12527,7 +13215,7 @@
           </a:bodyPr>
           <a:lstStyle/>
           <a:p>
-            <a:pPr algn="ctr" indent="0" marL="0">
+            <a:pPr marL="0" indent="0" algn="ctr">
               <a:buNone/>
             </a:pPr>
             <a:r>
@@ -12568,6 +13256,13 @@
             <a:prstDash val="solid"/>
           </a:ln>
         </p:spPr>
+        <p:txBody>
+          <a:bodyPr/>
+          <a:lstStyle/>
+          <a:p>
+            <a:endParaRPr lang="en-GB"/>
+          </a:p>
+        </p:txBody>
       </p:sp>
       <p:sp>
         <p:nvSpPr>
@@ -12592,7 +13287,7 @@
           </a:bodyPr>
           <a:lstStyle/>
           <a:p>
-            <a:pPr algn="ctr" indent="0" marL="0">
+            <a:pPr marL="0" indent="0" algn="ctr">
               <a:buNone/>
             </a:pPr>
             <a:r>
@@ -12630,7 +13325,7 @@
           </a:bodyPr>
           <a:lstStyle/>
           <a:p>
-            <a:pPr indent="0" marL="0">
+            <a:pPr marL="0" indent="0">
               <a:buNone/>
             </a:pPr>
             <a:r>
@@ -12644,7 +13339,7 @@
             <a:endParaRPr lang="en-US" sz="1080" dirty="0"/>
           </a:p>
           <a:p>
-            <a:pPr indent="0" marL="0">
+            <a:pPr marL="0" indent="0">
               <a:buNone/>
             </a:pPr>
             <a:r>
@@ -12658,7 +13353,7 @@
             <a:endParaRPr lang="en-US" sz="1080" dirty="0"/>
           </a:p>
           <a:p>
-            <a:pPr indent="0" marL="0">
+            <a:pPr marL="0" indent="0">
               <a:buNone/>
             </a:pPr>
             <a:r>
@@ -12689,6 +13384,7 @@
         <a:solidFill>
           <a:srgbClr val="FFFFFF"/>
         </a:solidFill>
+        <a:effectLst/>
       </p:bgPr>
     </p:bg>
     <p:spTree>
@@ -12729,6 +13425,13 @@
             <a:prstDash val="solid"/>
           </a:ln>
         </p:spPr>
+        <p:txBody>
+          <a:bodyPr/>
+          <a:lstStyle/>
+          <a:p>
+            <a:endParaRPr lang="en-GB"/>
+          </a:p>
+        </p:txBody>
       </p:sp>
       <p:sp>
         <p:nvSpPr>
@@ -12751,7 +13454,7 @@
           <a:bodyPr wrap="square" lIns="0" tIns="0" rIns="0" bIns="0" rtlCol="0" anchor="ctr"/>
           <a:lstStyle/>
           <a:p>
-            <a:pPr indent="0" marL="0">
+            <a:pPr marL="0" indent="0">
               <a:buNone/>
             </a:pPr>
             <a:r>
@@ -12790,7 +13493,7 @@
           <a:bodyPr wrap="square" lIns="0" tIns="0" rIns="0" bIns="0" rtlCol="0" anchor="ctr"/>
           <a:lstStyle/>
           <a:p>
-            <a:pPr indent="0" marL="0">
+            <a:pPr marL="0" indent="0">
               <a:buNone/>
             </a:pPr>
             <a:r>
@@ -12826,7 +13529,7 @@
           <a:bodyPr wrap="square" lIns="0" tIns="0" rIns="0" bIns="0" rtlCol="0" anchor="ctr"/>
           <a:lstStyle/>
           <a:p>
-            <a:pPr indent="0" marL="0">
+            <a:pPr marL="0" indent="0">
               <a:buNone/>
             </a:pPr>
             <a:r>
@@ -12862,7 +13565,7 @@
           <a:bodyPr wrap="square" lIns="0" tIns="0" rIns="0" bIns="0" rtlCol="0" anchor="ctr"/>
           <a:lstStyle/>
           <a:p>
-            <a:pPr algn="r" indent="0" marL="0">
+            <a:pPr marL="0" indent="0" algn="r">
               <a:buNone/>
             </a:pPr>
             <a:r>
@@ -12905,6 +13608,13 @@
             <a:prstDash val="solid"/>
           </a:ln>
         </p:spPr>
+        <p:txBody>
+          <a:bodyPr/>
+          <a:lstStyle/>
+          <a:p>
+            <a:endParaRPr lang="en-GB"/>
+          </a:p>
+        </p:txBody>
       </p:sp>
       <p:sp>
         <p:nvSpPr>
@@ -12927,7 +13637,7 @@
           <a:bodyPr wrap="square" lIns="0" tIns="0" rIns="0" bIns="0" rtlCol="0" anchor="ctr"/>
           <a:lstStyle/>
           <a:p>
-            <a:pPr indent="0" marL="0">
+            <a:pPr marL="0" indent="0">
               <a:buNone/>
             </a:pPr>
             <a:r>
@@ -12944,14 +13654,14 @@
       </p:sp>
       <p:pic>
         <p:nvPicPr>
-          <p:cNvPr id="9" name="Image 0" descr="/mnt/data/key_extracted_plots/16_rf_original_feature_importance.png">    </p:cNvPr>
+          <p:cNvPr id="9" name="Image 0" descr="/mnt/data/key_extracted_plots/16_rf_original_feature_importance.png"/>
           <p:cNvPicPr>
             <a:picLocks noChangeAspect="1"/>
           </p:cNvPicPr>
           <p:nvPr/>
         </p:nvPicPr>
         <p:blipFill>
-          <a:blip r:embed="rId1"/>
+          <a:blip r:embed="rId3"/>
           <a:stretch>
             <a:fillRect/>
           </a:stretch>
@@ -12994,6 +13704,13 @@
             <a:prstDash val="solid"/>
           </a:ln>
         </p:spPr>
+        <p:txBody>
+          <a:bodyPr/>
+          <a:lstStyle/>
+          <a:p>
+            <a:endParaRPr lang="en-GB"/>
+          </a:p>
+        </p:txBody>
       </p:sp>
       <p:sp>
         <p:nvSpPr>
@@ -13016,7 +13733,7 @@
           <a:bodyPr wrap="square" lIns="0" tIns="0" rIns="0" bIns="0" rtlCol="0" anchor="ctr"/>
           <a:lstStyle/>
           <a:p>
-            <a:pPr indent="0" marL="0">
+            <a:pPr marL="0" indent="0">
               <a:buNone/>
             </a:pPr>
             <a:r>
@@ -13033,14 +13750,14 @@
       </p:sp>
       <p:pic>
         <p:nvPicPr>
-          <p:cNvPr id="12" name="Image 1" descr="/mnt/data/key_extracted_plots/17_permutation_importance.png">    </p:cNvPr>
+          <p:cNvPr id="12" name="Image 1" descr="/mnt/data/key_extracted_plots/17_permutation_importance.png"/>
           <p:cNvPicPr>
             <a:picLocks noChangeAspect="1"/>
           </p:cNvPicPr>
           <p:nvPr/>
         </p:nvPicPr>
         <p:blipFill>
-          <a:blip r:embed="rId2"/>
+          <a:blip r:embed="rId4"/>
           <a:stretch>
             <a:fillRect/>
           </a:stretch>
@@ -13079,6 +13796,13 @@
             <a:prstDash val="solid"/>
           </a:ln>
         </p:spPr>
+        <p:txBody>
+          <a:bodyPr/>
+          <a:lstStyle/>
+          <a:p>
+            <a:endParaRPr lang="en-GB"/>
+          </a:p>
+        </p:txBody>
       </p:sp>
       <p:sp>
         <p:nvSpPr>
@@ -13101,7 +13825,7 @@
           <a:bodyPr wrap="square" lIns="0" tIns="0" rIns="0" bIns="0" rtlCol="0" anchor="ctr"/>
           <a:lstStyle/>
           <a:p>
-            <a:pPr algn="ctr" indent="0" marL="0">
+            <a:pPr marL="0" indent="0" algn="ctr">
               <a:buNone/>
             </a:pPr>
             <a:r>
@@ -13140,6 +13864,13 @@
             <a:prstDash val="solid"/>
           </a:ln>
         </p:spPr>
+        <p:txBody>
+          <a:bodyPr/>
+          <a:lstStyle/>
+          <a:p>
+            <a:endParaRPr lang="en-GB"/>
+          </a:p>
+        </p:txBody>
       </p:sp>
       <p:sp>
         <p:nvSpPr>
@@ -13162,7 +13893,7 @@
           <a:bodyPr wrap="square" lIns="0" tIns="0" rIns="0" bIns="0" rtlCol="0" anchor="ctr"/>
           <a:lstStyle/>
           <a:p>
-            <a:pPr algn="ctr" indent="0" marL="0">
+            <a:pPr marL="0" indent="0" algn="ctr">
               <a:buNone/>
             </a:pPr>
             <a:r>
@@ -13201,6 +13932,13 @@
             <a:prstDash val="solid"/>
           </a:ln>
         </p:spPr>
+        <p:txBody>
+          <a:bodyPr/>
+          <a:lstStyle/>
+          <a:p>
+            <a:endParaRPr lang="en-GB"/>
+          </a:p>
+        </p:txBody>
       </p:sp>
       <p:sp>
         <p:nvSpPr>
@@ -13223,7 +13961,7 @@
           <a:bodyPr wrap="square" lIns="0" tIns="0" rIns="0" bIns="0" rtlCol="0" anchor="ctr"/>
           <a:lstStyle/>
           <a:p>
-            <a:pPr algn="ctr" indent="0" marL="0">
+            <a:pPr marL="0" indent="0" algn="ctr">
               <a:buNone/>
             </a:pPr>
             <a:r>
@@ -13262,6 +14000,13 @@
             <a:prstDash val="solid"/>
           </a:ln>
         </p:spPr>
+        <p:txBody>
+          <a:bodyPr/>
+          <a:lstStyle/>
+          <a:p>
+            <a:endParaRPr lang="en-GB"/>
+          </a:p>
+        </p:txBody>
       </p:sp>
       <p:sp>
         <p:nvSpPr>
@@ -13284,7 +14029,7 @@
           <a:bodyPr wrap="square" lIns="0" tIns="0" rIns="0" bIns="0" rtlCol="0" anchor="ctr"/>
           <a:lstStyle/>
           <a:p>
-            <a:pPr algn="ctr" indent="0" marL="0">
+            <a:pPr marL="0" indent="0" algn="ctr">
               <a:buNone/>
             </a:pPr>
             <a:r>
@@ -13323,6 +14068,13 @@
             <a:prstDash val="solid"/>
           </a:ln>
         </p:spPr>
+        <p:txBody>
+          <a:bodyPr/>
+          <a:lstStyle/>
+          <a:p>
+            <a:endParaRPr lang="en-GB"/>
+          </a:p>
+        </p:txBody>
       </p:sp>
       <p:sp>
         <p:nvSpPr>
@@ -13345,7 +14097,7 @@
           <a:bodyPr wrap="square" lIns="0" tIns="0" rIns="0" bIns="0" rtlCol="0" anchor="ctr"/>
           <a:lstStyle/>
           <a:p>
-            <a:pPr algn="ctr" indent="0" marL="0">
+            <a:pPr marL="0" indent="0" algn="ctr">
               <a:buNone/>
             </a:pPr>
             <a:r>
@@ -13384,6 +14136,13 @@
             <a:prstDash val="solid"/>
           </a:ln>
         </p:spPr>
+        <p:txBody>
+          <a:bodyPr/>
+          <a:lstStyle/>
+          <a:p>
+            <a:endParaRPr lang="en-GB"/>
+          </a:p>
+        </p:txBody>
       </p:sp>
       <p:sp>
         <p:nvSpPr>
@@ -13406,7 +14165,7 @@
           <a:bodyPr wrap="square" lIns="0" tIns="0" rIns="0" bIns="0" rtlCol="0" anchor="ctr"/>
           <a:lstStyle/>
           <a:p>
-            <a:pPr algn="ctr" indent="0" marL="0">
+            <a:pPr marL="0" indent="0" algn="ctr">
               <a:buNone/>
             </a:pPr>
             <a:r>
@@ -13445,6 +14204,13 @@
             <a:prstDash val="solid"/>
           </a:ln>
         </p:spPr>
+        <p:txBody>
+          <a:bodyPr/>
+          <a:lstStyle/>
+          <a:p>
+            <a:endParaRPr lang="en-GB"/>
+          </a:p>
+        </p:txBody>
       </p:sp>
       <p:sp>
         <p:nvSpPr>
@@ -13467,7 +14233,7 @@
           <a:bodyPr wrap="square" lIns="0" tIns="0" rIns="0" bIns="0" rtlCol="0" anchor="ctr"/>
           <a:lstStyle/>
           <a:p>
-            <a:pPr algn="ctr" indent="0" marL="0">
+            <a:pPr marL="0" indent="0" algn="ctr">
               <a:buNone/>
             </a:pPr>
             <a:r>
@@ -13508,6 +14274,13 @@
             <a:prstDash val="solid"/>
           </a:ln>
         </p:spPr>
+        <p:txBody>
+          <a:bodyPr/>
+          <a:lstStyle/>
+          <a:p>
+            <a:endParaRPr lang="en-GB"/>
+          </a:p>
+        </p:txBody>
       </p:sp>
       <p:sp>
         <p:nvSpPr>
@@ -13532,7 +14305,7 @@
           </a:bodyPr>
           <a:lstStyle/>
           <a:p>
-            <a:pPr algn="l" indent="0" marL="0">
+            <a:pPr marL="0" indent="0" algn="l">
               <a:buNone/>
             </a:pPr>
             <a:r>
@@ -13573,6 +14346,13 @@
             <a:prstDash val="solid"/>
           </a:ln>
         </p:spPr>
+        <p:txBody>
+          <a:bodyPr/>
+          <a:lstStyle/>
+          <a:p>
+            <a:endParaRPr lang="en-GB"/>
+          </a:p>
+        </p:txBody>
       </p:sp>
       <p:sp>
         <p:nvSpPr>
@@ -13597,7 +14377,7 @@
           </a:bodyPr>
           <a:lstStyle/>
           <a:p>
-            <a:pPr algn="ctr" indent="0" marL="0">
+            <a:pPr marL="0" indent="0" algn="ctr">
               <a:buNone/>
             </a:pPr>
             <a:r>
@@ -13638,6 +14418,13 @@
             <a:prstDash val="solid"/>
           </a:ln>
         </p:spPr>
+        <p:txBody>
+          <a:bodyPr/>
+          <a:lstStyle/>
+          <a:p>
+            <a:endParaRPr lang="en-GB"/>
+          </a:p>
+        </p:txBody>
       </p:sp>
       <p:sp>
         <p:nvSpPr>
@@ -13662,7 +14449,7 @@
           </a:bodyPr>
           <a:lstStyle/>
           <a:p>
-            <a:pPr algn="ctr" indent="0" marL="0">
+            <a:pPr marL="0" indent="0" algn="ctr">
               <a:buNone/>
             </a:pPr>
             <a:r>
@@ -13703,6 +14490,13 @@
             <a:prstDash val="solid"/>
           </a:ln>
         </p:spPr>
+        <p:txBody>
+          <a:bodyPr/>
+          <a:lstStyle/>
+          <a:p>
+            <a:endParaRPr lang="en-GB"/>
+          </a:p>
+        </p:txBody>
       </p:sp>
       <p:sp>
         <p:nvSpPr>
@@ -13727,7 +14521,7 @@
           </a:bodyPr>
           <a:lstStyle/>
           <a:p>
-            <a:pPr algn="ctr" indent="0" marL="0">
+            <a:pPr marL="0" indent="0" algn="ctr">
               <a:buNone/>
             </a:pPr>
             <a:r>
@@ -13768,6 +14562,13 @@
             <a:prstDash val="solid"/>
           </a:ln>
         </p:spPr>
+        <p:txBody>
+          <a:bodyPr/>
+          <a:lstStyle/>
+          <a:p>
+            <a:endParaRPr lang="en-GB"/>
+          </a:p>
+        </p:txBody>
       </p:sp>
       <p:sp>
         <p:nvSpPr>
@@ -13792,7 +14593,7 @@
           </a:bodyPr>
           <a:lstStyle/>
           <a:p>
-            <a:pPr algn="ctr" indent="0" marL="0">
+            <a:pPr marL="0" indent="0" algn="ctr">
               <a:buNone/>
             </a:pPr>
             <a:r>
@@ -13833,6 +14634,13 @@
             <a:prstDash val="solid"/>
           </a:ln>
         </p:spPr>
+        <p:txBody>
+          <a:bodyPr/>
+          <a:lstStyle/>
+          <a:p>
+            <a:endParaRPr lang="en-GB"/>
+          </a:p>
+        </p:txBody>
       </p:sp>
       <p:sp>
         <p:nvSpPr>
@@ -13857,7 +14665,7 @@
           </a:bodyPr>
           <a:lstStyle/>
           <a:p>
-            <a:pPr algn="ctr" indent="0" marL="0">
+            <a:pPr marL="0" indent="0" algn="ctr">
               <a:buNone/>
             </a:pPr>
             <a:r>
@@ -13898,6 +14706,13 @@
             <a:prstDash val="solid"/>
           </a:ln>
         </p:spPr>
+        <p:txBody>
+          <a:bodyPr/>
+          <a:lstStyle/>
+          <a:p>
+            <a:endParaRPr lang="en-GB"/>
+          </a:p>
+        </p:txBody>
       </p:sp>
       <p:sp>
         <p:nvSpPr>
@@ -13922,7 +14737,7 @@
           </a:bodyPr>
           <a:lstStyle/>
           <a:p>
-            <a:pPr algn="ctr" indent="0" marL="0">
+            <a:pPr marL="0" indent="0" algn="ctr">
               <a:buNone/>
             </a:pPr>
             <a:r>
@@ -13963,6 +14778,13 @@
             <a:prstDash val="solid"/>
           </a:ln>
         </p:spPr>
+        <p:txBody>
+          <a:bodyPr/>
+          <a:lstStyle/>
+          <a:p>
+            <a:endParaRPr lang="en-GB"/>
+          </a:p>
+        </p:txBody>
       </p:sp>
       <p:sp>
         <p:nvSpPr>
@@ -13987,7 +14809,7 @@
           </a:bodyPr>
           <a:lstStyle/>
           <a:p>
-            <a:pPr algn="l" indent="0" marL="0">
+            <a:pPr marL="0" indent="0" algn="l">
               <a:buNone/>
             </a:pPr>
             <a:r>
@@ -14028,6 +14850,13 @@
             <a:prstDash val="solid"/>
           </a:ln>
         </p:spPr>
+        <p:txBody>
+          <a:bodyPr/>
+          <a:lstStyle/>
+          <a:p>
+            <a:endParaRPr lang="en-GB"/>
+          </a:p>
+        </p:txBody>
       </p:sp>
       <p:sp>
         <p:nvSpPr>
@@ -14052,7 +14881,7 @@
           </a:bodyPr>
           <a:lstStyle/>
           <a:p>
-            <a:pPr algn="ctr" indent="0" marL="0">
+            <a:pPr marL="0" indent="0" algn="ctr">
               <a:buNone/>
             </a:pPr>
             <a:r>
@@ -14093,6 +14922,13 @@
             <a:prstDash val="solid"/>
           </a:ln>
         </p:spPr>
+        <p:txBody>
+          <a:bodyPr/>
+          <a:lstStyle/>
+          <a:p>
+            <a:endParaRPr lang="en-GB"/>
+          </a:p>
+        </p:txBody>
       </p:sp>
       <p:sp>
         <p:nvSpPr>
@@ -14117,7 +14953,7 @@
           </a:bodyPr>
           <a:lstStyle/>
           <a:p>
-            <a:pPr algn="ctr" indent="0" marL="0">
+            <a:pPr marL="0" indent="0" algn="ctr">
               <a:buNone/>
             </a:pPr>
             <a:r>
@@ -14158,6 +14994,13 @@
             <a:prstDash val="solid"/>
           </a:ln>
         </p:spPr>
+        <p:txBody>
+          <a:bodyPr/>
+          <a:lstStyle/>
+          <a:p>
+            <a:endParaRPr lang="en-GB"/>
+          </a:p>
+        </p:txBody>
       </p:sp>
       <p:sp>
         <p:nvSpPr>
@@ -14182,7 +15025,7 @@
           </a:bodyPr>
           <a:lstStyle/>
           <a:p>
-            <a:pPr algn="ctr" indent="0" marL="0">
+            <a:pPr marL="0" indent="0" algn="ctr">
               <a:buNone/>
             </a:pPr>
             <a:r>
@@ -14223,6 +15066,13 @@
             <a:prstDash val="solid"/>
           </a:ln>
         </p:spPr>
+        <p:txBody>
+          <a:bodyPr/>
+          <a:lstStyle/>
+          <a:p>
+            <a:endParaRPr lang="en-GB"/>
+          </a:p>
+        </p:txBody>
       </p:sp>
       <p:sp>
         <p:nvSpPr>
@@ -14247,7 +15097,7 @@
           </a:bodyPr>
           <a:lstStyle/>
           <a:p>
-            <a:pPr algn="ctr" indent="0" marL="0">
+            <a:pPr marL="0" indent="0" algn="ctr">
               <a:buNone/>
             </a:pPr>
             <a:r>
@@ -14288,6 +15138,13 @@
             <a:prstDash val="solid"/>
           </a:ln>
         </p:spPr>
+        <p:txBody>
+          <a:bodyPr/>
+          <a:lstStyle/>
+          <a:p>
+            <a:endParaRPr lang="en-GB"/>
+          </a:p>
+        </p:txBody>
       </p:sp>
       <p:sp>
         <p:nvSpPr>
@@ -14312,7 +15169,7 @@
           </a:bodyPr>
           <a:lstStyle/>
           <a:p>
-            <a:pPr algn="ctr" indent="0" marL="0">
+            <a:pPr marL="0" indent="0" algn="ctr">
               <a:buNone/>
             </a:pPr>
             <a:r>
@@ -14353,6 +15210,13 @@
             <a:prstDash val="solid"/>
           </a:ln>
         </p:spPr>
+        <p:txBody>
+          <a:bodyPr/>
+          <a:lstStyle/>
+          <a:p>
+            <a:endParaRPr lang="en-GB"/>
+          </a:p>
+        </p:txBody>
       </p:sp>
       <p:sp>
         <p:nvSpPr>
@@ -14377,7 +15241,7 @@
           </a:bodyPr>
           <a:lstStyle/>
           <a:p>
-            <a:pPr algn="ctr" indent="0" marL="0">
+            <a:pPr marL="0" indent="0" algn="ctr">
               <a:buNone/>
             </a:pPr>
             <a:r>
@@ -14413,7 +15277,7 @@
           <a:bodyPr wrap="square" lIns="0" tIns="0" rIns="0" bIns="0" rtlCol="0" anchor="ctr"/>
           <a:lstStyle/>
           <a:p>
-            <a:pPr algn="ctr" indent="0" marL="0">
+            <a:pPr marL="0" indent="0" algn="ctr">
               <a:buNone/>
             </a:pPr>
             <a:r>
@@ -14729,4 +15593,319 @@
     </a:ext>
   </a:extLst>
 </a:theme>
+</file>
+
+<file path=ppt/theme/theme2.xml><?xml version="1.0" encoding="utf-8"?>
+<a:theme xmlns:a="http://schemas.openxmlformats.org/drawingml/2006/main" name="Office Theme">
+  <a:themeElements>
+    <a:clrScheme name="Office">
+      <a:dk1>
+        <a:sysClr val="windowText" lastClr="000000"/>
+      </a:dk1>
+      <a:lt1>
+        <a:sysClr val="window" lastClr="FFFFFF"/>
+      </a:lt1>
+      <a:dk2>
+        <a:srgbClr val="0E2841"/>
+      </a:dk2>
+      <a:lt2>
+        <a:srgbClr val="E8E8E8"/>
+      </a:lt2>
+      <a:accent1>
+        <a:srgbClr val="156082"/>
+      </a:accent1>
+      <a:accent2>
+        <a:srgbClr val="E97132"/>
+      </a:accent2>
+      <a:accent3>
+        <a:srgbClr val="196B24"/>
+      </a:accent3>
+      <a:accent4>
+        <a:srgbClr val="0F9ED5"/>
+      </a:accent4>
+      <a:accent5>
+        <a:srgbClr val="A02B93"/>
+      </a:accent5>
+      <a:accent6>
+        <a:srgbClr val="4EA72E"/>
+      </a:accent6>
+      <a:hlink>
+        <a:srgbClr val="467886"/>
+      </a:hlink>
+      <a:folHlink>
+        <a:srgbClr val="96607D"/>
+      </a:folHlink>
+    </a:clrScheme>
+    <a:fontScheme name="Office">
+      <a:majorFont>
+        <a:latin typeface="Aptos Display" panose="02110004020202020204"/>
+        <a:ea typeface=""/>
+        <a:cs typeface=""/>
+        <a:font script="Jpan" typeface="游ゴシック Light"/>
+        <a:font script="Hang" typeface="맑은 고딕"/>
+        <a:font script="Hans" typeface="等线 Light"/>
+        <a:font script="Hant" typeface="新細明體"/>
+        <a:font script="Arab" typeface="Times New Roman"/>
+        <a:font script="Hebr" typeface="Times New Roman"/>
+        <a:font script="Thai" typeface="Angsana New"/>
+        <a:font script="Ethi" typeface="Nyala"/>
+        <a:font script="Beng" typeface="Vrinda"/>
+        <a:font script="Gujr" typeface="Shruti"/>
+        <a:font script="Khmr" typeface="MoolBoran"/>
+        <a:font script="Knda" typeface="Tunga"/>
+        <a:font script="Guru" typeface="Raavi"/>
+        <a:font script="Cans" typeface="Euphemia"/>
+        <a:font script="Cher" typeface="Plantagenet Cherokee"/>
+        <a:font script="Yiii" typeface="Microsoft Yi Baiti"/>
+        <a:font script="Tibt" typeface="Microsoft Himalaya"/>
+        <a:font script="Thaa" typeface="MV Boli"/>
+        <a:font script="Deva" typeface="Mangal"/>
+        <a:font script="Telu" typeface="Gautami"/>
+        <a:font script="Taml" typeface="Latha"/>
+        <a:font script="Syrc" typeface="Estrangelo Edessa"/>
+        <a:font script="Orya" typeface="Kalinga"/>
+        <a:font script="Mlym" typeface="Kartika"/>
+        <a:font script="Laoo" typeface="DokChampa"/>
+        <a:font script="Sinh" typeface="Iskoola Pota"/>
+        <a:font script="Mong" typeface="Mongolian Baiti"/>
+        <a:font script="Viet" typeface="Times New Roman"/>
+        <a:font script="Uigh" typeface="Microsoft Uighur"/>
+        <a:font script="Geor" typeface="Sylfaen"/>
+        <a:font script="Armn" typeface="Arial"/>
+        <a:font script="Bugi" typeface="Leelawadee UI"/>
+        <a:font script="Bopo" typeface="Microsoft JhengHei"/>
+        <a:font script="Java" typeface="Javanese Text"/>
+        <a:font script="Lisu" typeface="Segoe UI"/>
+        <a:font script="Mymr" typeface="Myanmar Text"/>
+        <a:font script="Nkoo" typeface="Ebrima"/>
+        <a:font script="Olck" typeface="Nirmala UI"/>
+        <a:font script="Osma" typeface="Ebrima"/>
+        <a:font script="Phag" typeface="Phagspa"/>
+        <a:font script="Syrn" typeface="Estrangelo Edessa"/>
+        <a:font script="Syrj" typeface="Estrangelo Edessa"/>
+        <a:font script="Syre" typeface="Estrangelo Edessa"/>
+        <a:font script="Sora" typeface="Nirmala UI"/>
+        <a:font script="Tale" typeface="Microsoft Tai Le"/>
+        <a:font script="Talu" typeface="Microsoft New Tai Lue"/>
+        <a:font script="Tfng" typeface="Ebrima"/>
+      </a:majorFont>
+      <a:minorFont>
+        <a:latin typeface="Aptos" panose="02110004020202020204"/>
+        <a:ea typeface=""/>
+        <a:cs typeface=""/>
+        <a:font script="Jpan" typeface="游ゴシック"/>
+        <a:font script="Hang" typeface="맑은 고딕"/>
+        <a:font script="Hans" typeface="等线"/>
+        <a:font script="Hant" typeface="新細明體"/>
+        <a:font script="Arab" typeface="Arial"/>
+        <a:font script="Hebr" typeface="Arial"/>
+        <a:font script="Thai" typeface="Cordia New"/>
+        <a:font script="Ethi" typeface="Nyala"/>
+        <a:font script="Beng" typeface="Vrinda"/>
+        <a:font script="Gujr" typeface="Shruti"/>
+        <a:font script="Khmr" typeface="DaunPenh"/>
+        <a:font script="Knda" typeface="Tunga"/>
+        <a:font script="Guru" typeface="Raavi"/>
+        <a:font script="Cans" typeface="Euphemia"/>
+        <a:font script="Cher" typeface="Plantagenet Cherokee"/>
+        <a:font script="Yiii" typeface="Microsoft Yi Baiti"/>
+        <a:font script="Tibt" typeface="Microsoft Himalaya"/>
+        <a:font script="Thaa" typeface="MV Boli"/>
+        <a:font script="Deva" typeface="Mangal"/>
+        <a:font script="Telu" typeface="Gautami"/>
+        <a:font script="Taml" typeface="Latha"/>
+        <a:font script="Syrc" typeface="Estrangelo Edessa"/>
+        <a:font script="Orya" typeface="Kalinga"/>
+        <a:font script="Mlym" typeface="Kartika"/>
+        <a:font script="Laoo" typeface="DokChampa"/>
+        <a:font script="Sinh" typeface="Iskoola Pota"/>
+        <a:font script="Mong" typeface="Mongolian Baiti"/>
+        <a:font script="Viet" typeface="Arial"/>
+        <a:font script="Uigh" typeface="Microsoft Uighur"/>
+        <a:font script="Geor" typeface="Sylfaen"/>
+        <a:font script="Armn" typeface="Arial"/>
+        <a:font script="Bugi" typeface="Leelawadee UI"/>
+        <a:font script="Bopo" typeface="Microsoft JhengHei"/>
+        <a:font script="Java" typeface="Javanese Text"/>
+        <a:font script="Lisu" typeface="Segoe UI"/>
+        <a:font script="Mymr" typeface="Myanmar Text"/>
+        <a:font script="Nkoo" typeface="Ebrima"/>
+        <a:font script="Olck" typeface="Nirmala UI"/>
+        <a:font script="Osma" typeface="Ebrima"/>
+        <a:font script="Phag" typeface="Phagspa"/>
+        <a:font script="Syrn" typeface="Estrangelo Edessa"/>
+        <a:font script="Syrj" typeface="Estrangelo Edessa"/>
+        <a:font script="Syre" typeface="Estrangelo Edessa"/>
+        <a:font script="Sora" typeface="Nirmala UI"/>
+        <a:font script="Tale" typeface="Microsoft Tai Le"/>
+        <a:font script="Talu" typeface="Microsoft New Tai Lue"/>
+        <a:font script="Tfng" typeface="Ebrima"/>
+      </a:minorFont>
+    </a:fontScheme>
+    <a:fmtScheme name="Office">
+      <a:fillStyleLst>
+        <a:solidFill>
+          <a:schemeClr val="phClr"/>
+        </a:solidFill>
+        <a:gradFill rotWithShape="1">
+          <a:gsLst>
+            <a:gs pos="0">
+              <a:schemeClr val="phClr">
+                <a:lumMod val="110000"/>
+                <a:satMod val="105000"/>
+                <a:tint val="67000"/>
+              </a:schemeClr>
+            </a:gs>
+            <a:gs pos="50000">
+              <a:schemeClr val="phClr">
+                <a:lumMod val="105000"/>
+                <a:satMod val="103000"/>
+                <a:tint val="73000"/>
+              </a:schemeClr>
+            </a:gs>
+            <a:gs pos="100000">
+              <a:schemeClr val="phClr">
+                <a:lumMod val="105000"/>
+                <a:satMod val="109000"/>
+                <a:tint val="81000"/>
+              </a:schemeClr>
+            </a:gs>
+          </a:gsLst>
+          <a:lin ang="5400000" scaled="0"/>
+        </a:gradFill>
+        <a:gradFill rotWithShape="1">
+          <a:gsLst>
+            <a:gs pos="0">
+              <a:schemeClr val="phClr">
+                <a:satMod val="103000"/>
+                <a:lumMod val="102000"/>
+                <a:tint val="94000"/>
+              </a:schemeClr>
+            </a:gs>
+            <a:gs pos="50000">
+              <a:schemeClr val="phClr">
+                <a:satMod val="110000"/>
+                <a:lumMod val="100000"/>
+                <a:shade val="100000"/>
+              </a:schemeClr>
+            </a:gs>
+            <a:gs pos="100000">
+              <a:schemeClr val="phClr">
+                <a:lumMod val="99000"/>
+                <a:satMod val="120000"/>
+                <a:shade val="78000"/>
+              </a:schemeClr>
+            </a:gs>
+          </a:gsLst>
+          <a:lin ang="5400000" scaled="0"/>
+        </a:gradFill>
+      </a:fillStyleLst>
+      <a:lnStyleLst>
+        <a:ln w="12700" cap="flat" cmpd="sng" algn="ctr">
+          <a:solidFill>
+            <a:schemeClr val="phClr"/>
+          </a:solidFill>
+          <a:prstDash val="solid"/>
+          <a:miter lim="800000"/>
+        </a:ln>
+        <a:ln w="19050" cap="flat" cmpd="sng" algn="ctr">
+          <a:solidFill>
+            <a:schemeClr val="phClr"/>
+          </a:solidFill>
+          <a:prstDash val="solid"/>
+          <a:miter lim="800000"/>
+        </a:ln>
+        <a:ln w="25400" cap="flat" cmpd="sng" algn="ctr">
+          <a:solidFill>
+            <a:schemeClr val="phClr"/>
+          </a:solidFill>
+          <a:prstDash val="solid"/>
+          <a:miter lim="800000"/>
+        </a:ln>
+      </a:lnStyleLst>
+      <a:effectStyleLst>
+        <a:effectStyle>
+          <a:effectLst/>
+        </a:effectStyle>
+        <a:effectStyle>
+          <a:effectLst/>
+        </a:effectStyle>
+        <a:effectStyle>
+          <a:effectLst>
+            <a:outerShdw blurRad="57150" dist="19050" dir="5400000" algn="ctr" rotWithShape="0">
+              <a:srgbClr val="000000">
+                <a:alpha val="63000"/>
+              </a:srgbClr>
+            </a:outerShdw>
+          </a:effectLst>
+        </a:effectStyle>
+      </a:effectStyleLst>
+      <a:bgFillStyleLst>
+        <a:solidFill>
+          <a:schemeClr val="phClr"/>
+        </a:solidFill>
+        <a:solidFill>
+          <a:schemeClr val="phClr">
+            <a:tint val="95000"/>
+            <a:satMod val="170000"/>
+          </a:schemeClr>
+        </a:solidFill>
+        <a:gradFill rotWithShape="1">
+          <a:gsLst>
+            <a:gs pos="0">
+              <a:schemeClr val="phClr">
+                <a:tint val="93000"/>
+                <a:satMod val="150000"/>
+                <a:shade val="98000"/>
+                <a:lumMod val="102000"/>
+              </a:schemeClr>
+            </a:gs>
+            <a:gs pos="50000">
+              <a:schemeClr val="phClr">
+                <a:tint val="98000"/>
+                <a:satMod val="130000"/>
+                <a:shade val="90000"/>
+                <a:lumMod val="103000"/>
+              </a:schemeClr>
+            </a:gs>
+            <a:gs pos="100000">
+              <a:schemeClr val="phClr">
+                <a:shade val="63000"/>
+                <a:satMod val="120000"/>
+              </a:schemeClr>
+            </a:gs>
+          </a:gsLst>
+          <a:lin ang="5400000" scaled="0"/>
+        </a:gradFill>
+      </a:bgFillStyleLst>
+    </a:fmtScheme>
+  </a:themeElements>
+  <a:objectDefaults>
+    <a:lnDef>
+      <a:spPr/>
+      <a:bodyPr/>
+      <a:lstStyle/>
+      <a:style>
+        <a:lnRef idx="2">
+          <a:schemeClr val="accent1"/>
+        </a:lnRef>
+        <a:fillRef idx="0">
+          <a:schemeClr val="accent1"/>
+        </a:fillRef>
+        <a:effectRef idx="1">
+          <a:schemeClr val="accent1"/>
+        </a:effectRef>
+        <a:fontRef idx="minor">
+          <a:schemeClr val="tx1"/>
+        </a:fontRef>
+      </a:style>
+    </a:lnDef>
+  </a:objectDefaults>
+  <a:extraClrSchemeLst/>
+  <a:extLst>
+    <a:ext uri="{05A4C25C-085E-4340-85A3-A5531E510DB2}">
+      <thm15:themeFamily xmlns:thm15="http://schemas.microsoft.com/office/thememl/2012/main" name="Office Theme" id="{2E142A2C-CD16-42D6-873A-C26D2A0506FA}" vid="{1BDDFF52-6CD6-40A5-AB3C-68EB2F1E4D0A}"/>
+    </a:ext>
+  </a:extLst>
+</a:theme>
 </file>